--- a/2025_seminarski/ml24821_Tanja_Sevic/bazePodataka.pptx
+++ b/2025_seminarski/ml24821_Tanja_Sevic/bazePodataka.pptx
@@ -123,6 +123,11 @@
       </a:defRPr>
     </a:lvl9pPr>
   </p:defaultTextStyle>
+  <p:extLst>
+    <p:ext uri="{EFAFB233-063F-42B5-8137-9DF3F51BA10A}">
+      <p15:sldGuideLst xmlns:p15="http://schemas.microsoft.com/office/powerpoint/2012/main"/>
+    </p:ext>
+  </p:extLst>
 </p:presentation>
 </file>
 
@@ -315,7 +320,7 @@
             <a:fld id="{B61BEF0D-F0BB-DE4B-95CE-6DB70DBA9567}" type="datetimeFigureOut">
               <a:rPr lang="en-US" dirty="0"/>
               <a:pPr/>
-              <a:t>3/11/2026</a:t>
+              <a:t>3/19/2026</a:t>
             </a:fld>
             <a:endParaRPr lang="en-US" dirty="0"/>
           </a:p>
@@ -650,7 +655,7 @@
             <a:fld id="{B61BEF0D-F0BB-DE4B-95CE-6DB70DBA9567}" type="datetimeFigureOut">
               <a:rPr lang="en-US" dirty="0"/>
               <a:pPr/>
-              <a:t>3/11/2026</a:t>
+              <a:t>3/19/2026</a:t>
             </a:fld>
             <a:endParaRPr lang="en-US" dirty="0"/>
           </a:p>
@@ -1048,7 +1053,7 @@
             <a:fld id="{B61BEF0D-F0BB-DE4B-95CE-6DB70DBA9567}" type="datetimeFigureOut">
               <a:rPr lang="en-US" dirty="0"/>
               <a:pPr/>
-              <a:t>3/11/2026</a:t>
+              <a:t>3/19/2026</a:t>
             </a:fld>
             <a:endParaRPr lang="en-US" dirty="0"/>
           </a:p>
@@ -1380,7 +1385,7 @@
             <a:fld id="{B61BEF0D-F0BB-DE4B-95CE-6DB70DBA9567}" type="datetimeFigureOut">
               <a:rPr lang="en-US" dirty="0"/>
               <a:pPr/>
-              <a:t>3/11/2026</a:t>
+              <a:t>3/19/2026</a:t>
             </a:fld>
             <a:endParaRPr lang="en-US" dirty="0"/>
           </a:p>
@@ -1697,7 +1702,7 @@
             <a:fld id="{B61BEF0D-F0BB-DE4B-95CE-6DB70DBA9567}" type="datetimeFigureOut">
               <a:rPr lang="en-US" dirty="0"/>
               <a:pPr/>
-              <a:t>3/11/2026</a:t>
+              <a:t>3/19/2026</a:t>
             </a:fld>
             <a:endParaRPr lang="en-US" dirty="0"/>
           </a:p>
@@ -2090,7 +2095,7 @@
             <a:fld id="{B61BEF0D-F0BB-DE4B-95CE-6DB70DBA9567}" type="datetimeFigureOut">
               <a:rPr lang="en-US" dirty="0"/>
               <a:pPr/>
-              <a:t>3/11/2026</a:t>
+              <a:t>3/19/2026</a:t>
             </a:fld>
             <a:endParaRPr lang="en-US" dirty="0"/>
           </a:p>
@@ -2344,7 +2349,7 @@
             <a:fld id="{B61BEF0D-F0BB-DE4B-95CE-6DB70DBA9567}" type="datetimeFigureOut">
               <a:rPr lang="en-US" dirty="0"/>
               <a:pPr/>
-              <a:t>3/11/2026</a:t>
+              <a:t>3/19/2026</a:t>
             </a:fld>
             <a:endParaRPr lang="en-US" dirty="0"/>
           </a:p>
@@ -2603,7 +2608,7 @@
             <a:fld id="{B61BEF0D-F0BB-DE4B-95CE-6DB70DBA9567}" type="datetimeFigureOut">
               <a:rPr lang="en-US" dirty="0"/>
               <a:pPr/>
-              <a:t>3/11/2026</a:t>
+              <a:t>3/19/2026</a:t>
             </a:fld>
             <a:endParaRPr lang="en-US" dirty="0"/>
           </a:p>
@@ -2862,7 +2867,7 @@
             <a:fld id="{B61BEF0D-F0BB-DE4B-95CE-6DB70DBA9567}" type="datetimeFigureOut">
               <a:rPr lang="en-US" dirty="0"/>
               <a:pPr/>
-              <a:t>3/11/2026</a:t>
+              <a:t>3/19/2026</a:t>
             </a:fld>
             <a:endParaRPr lang="en-US" dirty="0"/>
           </a:p>
@@ -3188,7 +3193,7 @@
             <a:fld id="{B61BEF0D-F0BB-DE4B-95CE-6DB70DBA9567}" type="datetimeFigureOut">
               <a:rPr lang="en-US" dirty="0"/>
               <a:pPr/>
-              <a:t>3/11/2026</a:t>
+              <a:t>3/19/2026</a:t>
             </a:fld>
             <a:endParaRPr lang="en-US" dirty="0"/>
           </a:p>
@@ -3508,7 +3513,7 @@
             <a:fld id="{B61BEF0D-F0BB-DE4B-95CE-6DB70DBA9567}" type="datetimeFigureOut">
               <a:rPr lang="en-US" dirty="0"/>
               <a:pPr/>
-              <a:t>3/11/2026</a:t>
+              <a:t>3/19/2026</a:t>
             </a:fld>
             <a:endParaRPr lang="en-US" dirty="0"/>
           </a:p>
@@ -3962,7 +3967,7 @@
             <a:fld id="{B61BEF0D-F0BB-DE4B-95CE-6DB70DBA9567}" type="datetimeFigureOut">
               <a:rPr lang="en-US" dirty="0"/>
               <a:pPr/>
-              <a:t>3/11/2026</a:t>
+              <a:t>3/19/2026</a:t>
             </a:fld>
             <a:endParaRPr lang="en-US" dirty="0"/>
           </a:p>
@@ -4164,7 +4169,7 @@
             <a:fld id="{B61BEF0D-F0BB-DE4B-95CE-6DB70DBA9567}" type="datetimeFigureOut">
               <a:rPr lang="en-US" dirty="0"/>
               <a:pPr/>
-              <a:t>3/11/2026</a:t>
+              <a:t>3/19/2026</a:t>
             </a:fld>
             <a:endParaRPr lang="en-US" dirty="0"/>
           </a:p>
@@ -4338,7 +4343,7 @@
             <a:fld id="{B61BEF0D-F0BB-DE4B-95CE-6DB70DBA9567}" type="datetimeFigureOut">
               <a:rPr lang="en-US" dirty="0"/>
               <a:pPr/>
-              <a:t>3/11/2026</a:t>
+              <a:t>3/19/2026</a:t>
             </a:fld>
             <a:endParaRPr lang="en-US" dirty="0"/>
           </a:p>
@@ -4668,7 +4673,7 @@
             <a:fld id="{B61BEF0D-F0BB-DE4B-95CE-6DB70DBA9567}" type="datetimeFigureOut">
               <a:rPr lang="en-US" dirty="0"/>
               <a:pPr/>
-              <a:t>3/11/2026</a:t>
+              <a:t>3/19/2026</a:t>
             </a:fld>
             <a:endParaRPr lang="en-US" dirty="0"/>
           </a:p>
@@ -5010,7 +5015,7 @@
             <a:fld id="{B61BEF0D-F0BB-DE4B-95CE-6DB70DBA9567}" type="datetimeFigureOut">
               <a:rPr lang="en-US" dirty="0"/>
               <a:pPr/>
-              <a:t>3/11/2026</a:t>
+              <a:t>3/19/2026</a:t>
             </a:fld>
             <a:endParaRPr lang="en-US" dirty="0"/>
           </a:p>
@@ -7124,7 +7129,7 @@
             <a:fld id="{B61BEF0D-F0BB-DE4B-95CE-6DB70DBA9567}" type="datetimeFigureOut">
               <a:rPr lang="en-US" dirty="0"/>
               <a:pPr/>
-              <a:t>3/11/2026</a:t>
+              <a:t>3/19/2026</a:t>
             </a:fld>
             <a:endParaRPr lang="en-US" dirty="0"/>
           </a:p>
@@ -7696,6 +7701,269 @@
           </a:p>
         </p:txBody>
       </p:sp>
+      <p:sp>
+        <p:nvSpPr>
+          <p:cNvPr id="5" name="Subtitle 2"/>
+          <p:cNvSpPr txBox="1">
+            <a:spLocks/>
+          </p:cNvSpPr>
+          <p:nvPr/>
+        </p:nvSpPr>
+        <p:spPr>
+          <a:xfrm>
+            <a:off x="8170863" y="5870652"/>
+            <a:ext cx="3905250" cy="893512"/>
+          </a:xfrm>
+          <a:prstGeom prst="rect">
+            <a:avLst/>
+          </a:prstGeom>
+        </p:spPr>
+        <p:txBody>
+          <a:bodyPr vert="horz" lIns="91440" tIns="45720" rIns="91440" bIns="45720" rtlCol="0" anchor="t">
+            <a:noAutofit/>
+          </a:bodyPr>
+          <a:lstStyle>
+            <a:lvl1pPr marL="0" indent="0" algn="l" defTabSz="457200" rtl="0" eaLnBrk="1" latinLnBrk="0" hangingPunct="1">
+              <a:spcBef>
+                <a:spcPts val="1000"/>
+              </a:spcBef>
+              <a:spcAft>
+                <a:spcPts val="0"/>
+              </a:spcAft>
+              <a:buClr>
+                <a:schemeClr val="accent1"/>
+              </a:buClr>
+              <a:buFont typeface="Wingdings 3" charset="2"/>
+              <a:buNone/>
+              <a:defRPr sz="1800" kern="1200">
+                <a:solidFill>
+                  <a:schemeClr val="tx1">
+                    <a:lumMod val="65000"/>
+                    <a:lumOff val="35000"/>
+                  </a:schemeClr>
+                </a:solidFill>
+                <a:latin typeface="+mn-lt"/>
+                <a:ea typeface="+mn-ea"/>
+                <a:cs typeface="+mn-cs"/>
+              </a:defRPr>
+            </a:lvl1pPr>
+            <a:lvl2pPr marL="457200" indent="0" algn="ctr" defTabSz="457200" rtl="0" eaLnBrk="1" latinLnBrk="0" hangingPunct="1">
+              <a:spcBef>
+                <a:spcPts val="1000"/>
+              </a:spcBef>
+              <a:spcAft>
+                <a:spcPts val="0"/>
+              </a:spcAft>
+              <a:buClr>
+                <a:schemeClr val="accent1"/>
+              </a:buClr>
+              <a:buFont typeface="Wingdings 3" charset="2"/>
+              <a:buNone/>
+              <a:defRPr sz="1600" kern="1200">
+                <a:solidFill>
+                  <a:schemeClr val="tx1">
+                    <a:tint val="75000"/>
+                  </a:schemeClr>
+                </a:solidFill>
+                <a:latin typeface="+mn-lt"/>
+                <a:ea typeface="+mn-ea"/>
+                <a:cs typeface="+mn-cs"/>
+              </a:defRPr>
+            </a:lvl2pPr>
+            <a:lvl3pPr marL="914400" indent="0" algn="ctr" defTabSz="457200" rtl="0" eaLnBrk="1" latinLnBrk="0" hangingPunct="1">
+              <a:spcBef>
+                <a:spcPts val="1000"/>
+              </a:spcBef>
+              <a:spcAft>
+                <a:spcPts val="0"/>
+              </a:spcAft>
+              <a:buClr>
+                <a:schemeClr val="accent1"/>
+              </a:buClr>
+              <a:buFont typeface="Wingdings 3" charset="2"/>
+              <a:buNone/>
+              <a:defRPr sz="1400" kern="1200">
+                <a:solidFill>
+                  <a:schemeClr val="tx1">
+                    <a:tint val="75000"/>
+                  </a:schemeClr>
+                </a:solidFill>
+                <a:latin typeface="+mn-lt"/>
+                <a:ea typeface="+mn-ea"/>
+                <a:cs typeface="+mn-cs"/>
+              </a:defRPr>
+            </a:lvl3pPr>
+            <a:lvl4pPr marL="1371600" indent="0" algn="ctr" defTabSz="457200" rtl="0" eaLnBrk="1" latinLnBrk="0" hangingPunct="1">
+              <a:spcBef>
+                <a:spcPts val="1000"/>
+              </a:spcBef>
+              <a:spcAft>
+                <a:spcPts val="0"/>
+              </a:spcAft>
+              <a:buClr>
+                <a:schemeClr val="accent1"/>
+              </a:buClr>
+              <a:buFont typeface="Wingdings 3" charset="2"/>
+              <a:buNone/>
+              <a:defRPr sz="1200" kern="1200">
+                <a:solidFill>
+                  <a:schemeClr val="tx1">
+                    <a:tint val="75000"/>
+                  </a:schemeClr>
+                </a:solidFill>
+                <a:latin typeface="+mn-lt"/>
+                <a:ea typeface="+mn-ea"/>
+                <a:cs typeface="+mn-cs"/>
+              </a:defRPr>
+            </a:lvl4pPr>
+            <a:lvl5pPr marL="1828800" indent="0" algn="ctr" defTabSz="457200" rtl="0" eaLnBrk="1" latinLnBrk="0" hangingPunct="1">
+              <a:spcBef>
+                <a:spcPts val="1000"/>
+              </a:spcBef>
+              <a:spcAft>
+                <a:spcPts val="0"/>
+              </a:spcAft>
+              <a:buClr>
+                <a:schemeClr val="accent1"/>
+              </a:buClr>
+              <a:buFont typeface="Wingdings 3" charset="2"/>
+              <a:buNone/>
+              <a:defRPr sz="1200" kern="1200">
+                <a:solidFill>
+                  <a:schemeClr val="tx1">
+                    <a:tint val="75000"/>
+                  </a:schemeClr>
+                </a:solidFill>
+                <a:latin typeface="+mn-lt"/>
+                <a:ea typeface="+mn-ea"/>
+                <a:cs typeface="+mn-cs"/>
+              </a:defRPr>
+            </a:lvl5pPr>
+            <a:lvl6pPr marL="2286000" indent="0" algn="ctr" defTabSz="457200" rtl="0" eaLnBrk="1" latinLnBrk="0" hangingPunct="1">
+              <a:spcBef>
+                <a:spcPts val="1000"/>
+              </a:spcBef>
+              <a:spcAft>
+                <a:spcPts val="0"/>
+              </a:spcAft>
+              <a:buClr>
+                <a:schemeClr val="accent1"/>
+              </a:buClr>
+              <a:buFont typeface="Wingdings 3" charset="2"/>
+              <a:buNone/>
+              <a:defRPr sz="1200" kern="1200">
+                <a:solidFill>
+                  <a:schemeClr val="tx1">
+                    <a:tint val="75000"/>
+                  </a:schemeClr>
+                </a:solidFill>
+                <a:latin typeface="+mn-lt"/>
+                <a:ea typeface="+mn-ea"/>
+                <a:cs typeface="+mn-cs"/>
+              </a:defRPr>
+            </a:lvl6pPr>
+            <a:lvl7pPr marL="2743200" indent="0" algn="ctr" defTabSz="457200" rtl="0" eaLnBrk="1" latinLnBrk="0" hangingPunct="1">
+              <a:spcBef>
+                <a:spcPts val="1000"/>
+              </a:spcBef>
+              <a:spcAft>
+                <a:spcPts val="0"/>
+              </a:spcAft>
+              <a:buClr>
+                <a:schemeClr val="accent1"/>
+              </a:buClr>
+              <a:buFont typeface="Wingdings 3" charset="2"/>
+              <a:buNone/>
+              <a:defRPr sz="1200" kern="1200">
+                <a:solidFill>
+                  <a:schemeClr val="tx1">
+                    <a:tint val="75000"/>
+                  </a:schemeClr>
+                </a:solidFill>
+                <a:latin typeface="+mn-lt"/>
+                <a:ea typeface="+mn-ea"/>
+                <a:cs typeface="+mn-cs"/>
+              </a:defRPr>
+            </a:lvl7pPr>
+            <a:lvl8pPr marL="3200400" indent="0" algn="ctr" defTabSz="457200" rtl="0" eaLnBrk="1" latinLnBrk="0" hangingPunct="1">
+              <a:spcBef>
+                <a:spcPts val="1000"/>
+              </a:spcBef>
+              <a:spcAft>
+                <a:spcPts val="0"/>
+              </a:spcAft>
+              <a:buClr>
+                <a:schemeClr val="accent1"/>
+              </a:buClr>
+              <a:buFont typeface="Wingdings 3" charset="2"/>
+              <a:buNone/>
+              <a:defRPr sz="1200" kern="1200">
+                <a:solidFill>
+                  <a:schemeClr val="tx1">
+                    <a:tint val="75000"/>
+                  </a:schemeClr>
+                </a:solidFill>
+                <a:latin typeface="+mn-lt"/>
+                <a:ea typeface="+mn-ea"/>
+                <a:cs typeface="+mn-cs"/>
+              </a:defRPr>
+            </a:lvl8pPr>
+            <a:lvl9pPr marL="3657600" indent="0" algn="ctr" defTabSz="457200" rtl="0" eaLnBrk="1" latinLnBrk="0" hangingPunct="1">
+              <a:spcBef>
+                <a:spcPts val="1000"/>
+              </a:spcBef>
+              <a:spcAft>
+                <a:spcPts val="0"/>
+              </a:spcAft>
+              <a:buClr>
+                <a:schemeClr val="accent1"/>
+              </a:buClr>
+              <a:buFont typeface="Wingdings 3" charset="2"/>
+              <a:buNone/>
+              <a:defRPr sz="1200" kern="1200">
+                <a:solidFill>
+                  <a:schemeClr val="tx1">
+                    <a:tint val="75000"/>
+                  </a:schemeClr>
+                </a:solidFill>
+                <a:latin typeface="+mn-lt"/>
+                <a:ea typeface="+mn-ea"/>
+                <a:cs typeface="+mn-cs"/>
+              </a:defRPr>
+            </a:lvl9pPr>
+          </a:lstStyle>
+          <a:p>
+            <a:pPr algn="r"/>
+            <a:r>
+              <a:rPr lang="sr-Latn-RS" sz="1200" dirty="0"/>
+              <a:t>Metodika nastave matematike </a:t>
+            </a:r>
+            <a:r>
+              <a:rPr lang="sr-Latn-RS" sz="1200" dirty="0" smtClean="0"/>
+              <a:t>a</a:t>
+            </a:r>
+          </a:p>
+          <a:p>
+            <a:pPr algn="r"/>
+            <a:r>
+              <a:rPr lang="sr-Latn-RS" sz="1200" dirty="0" smtClean="0"/>
+              <a:t>Prof. Sana Stojanović Đurđević</a:t>
+            </a:r>
+          </a:p>
+          <a:p>
+            <a:pPr algn="r"/>
+            <a:r>
+              <a:rPr lang="sr-Latn-RS" sz="1200" dirty="0"/>
+              <a:t>m</a:t>
+            </a:r>
+            <a:r>
+              <a:rPr lang="sr-Latn-RS" sz="1200" dirty="0" smtClean="0"/>
+              <a:t>art 2026.</a:t>
+            </a:r>
+            <a:endParaRPr lang="en-US" sz="1200" dirty="0"/>
+          </a:p>
+        </p:txBody>
+      </p:sp>
     </p:spTree>
     <p:extLst>
       <p:ext uri="{BB962C8B-B14F-4D97-AF65-F5344CB8AC3E}">
@@ -7757,7 +8025,7 @@
           <a:p>
             <a:r>
               <a:rPr lang="en-US" sz="4000" dirty="0" err="1"/>
-              <a:t>Pojam</a:t>
+              <a:t>Osnovni</a:t>
             </a:r>
             <a:r>
               <a:rPr lang="en-US" sz="4000" dirty="0"/>
@@ -7765,7 +8033,7 @@
             </a:r>
             <a:r>
               <a:rPr lang="en-US" sz="4000" dirty="0" err="1"/>
-              <a:t>baze</a:t>
+              <a:t>pojmovi</a:t>
             </a:r>
             <a:r>
               <a:rPr lang="en-US" sz="4000" dirty="0"/>
@@ -7773,9 +8041,17 @@
             </a:r>
             <a:r>
               <a:rPr lang="en-US" sz="4000" dirty="0" err="1"/>
-              <a:t>podataka</a:t>
-            </a:r>
-            <a:endParaRPr lang="en-US" sz="4000" dirty="0"/>
+              <a:t>relacionih</a:t>
+            </a:r>
+            <a:r>
+              <a:rPr lang="en-US" sz="4000" dirty="0"/>
+              <a:t> </a:t>
+            </a:r>
+            <a:r>
+              <a:rPr lang="en-US" sz="4000" dirty="0" err="1" smtClean="0"/>
+              <a:t>baza</a:t>
+            </a:r>
+            <a:endParaRPr lang="sr-Latn-RS" sz="4000" dirty="0"/>
           </a:p>
         </p:txBody>
       </p:sp>
@@ -7791,8 +8067,8 @@
         </p:nvSpPr>
         <p:spPr>
           <a:xfrm>
-            <a:off x="1868129" y="1904999"/>
-            <a:ext cx="9438046" cy="4829175"/>
+            <a:off x="1868128" y="1904999"/>
+            <a:ext cx="9636483" cy="4829175"/>
           </a:xfrm>
         </p:spPr>
         <p:txBody>
@@ -7801,50 +8077,17 @@
           </a:bodyPr>
           <a:lstStyle/>
           <a:p>
-            <a:pPr marL="0" indent="0">
-              <a:buNone/>
-            </a:pPr>
-            <a:r>
-              <a:rPr lang="en-US" sz="2800" dirty="0" err="1"/>
-              <a:t>Osnovni</a:t>
-            </a:r>
-            <a:r>
-              <a:rPr lang="en-US" sz="2800" dirty="0"/>
-              <a:t> </a:t>
-            </a:r>
-            <a:r>
-              <a:rPr lang="en-US" sz="2800" dirty="0" err="1"/>
-              <a:t>pojmovi</a:t>
-            </a:r>
-            <a:r>
-              <a:rPr lang="en-US" sz="2800" dirty="0"/>
-              <a:t> </a:t>
-            </a:r>
-            <a:r>
-              <a:rPr lang="en-US" sz="2800" dirty="0" err="1"/>
-              <a:t>relacionih</a:t>
-            </a:r>
-            <a:r>
-              <a:rPr lang="en-US" sz="2800" dirty="0"/>
-              <a:t> </a:t>
-            </a:r>
             <a:r>
               <a:rPr lang="en-US" sz="2800" dirty="0" err="1" smtClean="0"/>
-              <a:t>baza</a:t>
-            </a:r>
-            <a:r>
-              <a:rPr lang="sr-Latn-RS" sz="2800" dirty="0" smtClean="0"/>
-              <a:t>:</a:t>
-            </a:r>
-          </a:p>
-          <a:p>
-            <a:r>
-              <a:rPr lang="en-US" sz="2800" dirty="0" err="1"/>
               <a:t>Tabela</a:t>
             </a:r>
             <a:r>
-              <a:rPr lang="en-US" sz="2800" dirty="0"/>
-              <a:t> (</a:t>
+              <a:rPr lang="en-US" sz="2800" dirty="0" smtClean="0"/>
+              <a:t> </a:t>
+            </a:r>
+            <a:r>
+              <a:rPr lang="en-US" sz="2800" dirty="0"/>
+              <a:t>(</a:t>
             </a:r>
             <a:r>
               <a:rPr lang="en-US" sz="2800" dirty="0" err="1"/>
@@ -8009,11 +8252,19 @@
               <a:t> </a:t>
             </a:r>
             <a:r>
-              <a:rPr lang="en-US" sz="2800" dirty="0" err="1"/>
+              <a:rPr lang="sr-Latn-RS" sz="2800" dirty="0"/>
+              <a:t> </a:t>
+            </a:r>
+            <a:r>
+              <a:rPr lang="sr-Latn-RS" sz="2800" dirty="0" smtClean="0"/>
+              <a:t>                                     </a:t>
+            </a:r>
+            <a:r>
+              <a:rPr lang="en-US" sz="2800" dirty="0" err="1" smtClean="0"/>
               <a:t>konkretan</a:t>
             </a:r>
             <a:r>
-              <a:rPr lang="en-US" sz="2800" dirty="0"/>
+              <a:rPr lang="en-US" sz="2800" dirty="0" smtClean="0"/>
               <a:t> </a:t>
             </a:r>
             <a:r>
@@ -8069,7 +8320,15 @@
             </a:r>
             <a:r>
               <a:rPr lang="en-US" sz="2800" dirty="0"/>
-              <a:t> se </a:t>
+              <a:t> </a:t>
+            </a:r>
+            <a:r>
+              <a:rPr lang="sr-Latn-RS" sz="2800" dirty="0" smtClean="0"/>
+              <a:t>                                                    </a:t>
+            </a:r>
+            <a:r>
+              <a:rPr lang="en-US" sz="2800" dirty="0" smtClean="0"/>
+              <a:t>se </a:t>
             </a:r>
             <a:r>
               <a:rPr lang="en-US" sz="2800" dirty="0" err="1"/>
@@ -8098,6 +8357,27 @@
           </a:p>
         </p:txBody>
       </p:sp>
+      <p:pic>
+        <p:nvPicPr>
+          <p:cNvPr id="7" name="Picture 6"/>
+          <p:cNvPicPr/>
+          <p:nvPr/>
+        </p:nvPicPr>
+        <p:blipFill rotWithShape="1">
+          <a:blip r:embed="rId2"/>
+          <a:srcRect r="9194"/>
+          <a:stretch/>
+        </p:blipFill>
+        <p:spPr>
+          <a:xfrm>
+            <a:off x="6962775" y="3629025"/>
+            <a:ext cx="4238625" cy="2176145"/>
+          </a:xfrm>
+          <a:prstGeom prst="rect">
+            <a:avLst/>
+          </a:prstGeom>
+        </p:spPr>
+      </p:pic>
     </p:spTree>
     <p:extLst>
       <p:ext uri="{BB962C8B-B14F-4D97-AF65-F5344CB8AC3E}">
@@ -8159,25 +8439,25 @@
           <a:p>
             <a:r>
               <a:rPr lang="en-US" sz="4000" dirty="0" err="1"/>
-              <a:t>Pojam</a:t>
+              <a:t>Ključevi</a:t>
             </a:r>
             <a:r>
               <a:rPr lang="en-US" sz="4000" dirty="0"/>
-              <a:t> </a:t>
+              <a:t> u </a:t>
             </a:r>
             <a:r>
               <a:rPr lang="en-US" sz="4000" dirty="0" err="1"/>
-              <a:t>baze</a:t>
+              <a:t>bazama</a:t>
             </a:r>
             <a:r>
               <a:rPr lang="en-US" sz="4000" dirty="0"/>
               <a:t> </a:t>
             </a:r>
             <a:r>
-              <a:rPr lang="en-US" sz="4000" dirty="0" err="1"/>
+              <a:rPr lang="en-US" sz="4000" dirty="0" err="1" smtClean="0"/>
               <a:t>podataka</a:t>
             </a:r>
-            <a:endParaRPr lang="en-US" sz="4000" dirty="0"/>
+            <a:endParaRPr lang="sr-Latn-RS" sz="4000" dirty="0"/>
           </a:p>
         </p:txBody>
       </p:sp>
@@ -8193,7 +8473,7 @@
         </p:nvSpPr>
         <p:spPr>
           <a:xfrm>
-            <a:off x="1868129" y="1986116"/>
+            <a:off x="1868129" y="1805141"/>
             <a:ext cx="8915400" cy="3777622"/>
           </a:xfrm>
         </p:spPr>
@@ -8203,41 +8483,12 @@
           </a:bodyPr>
           <a:lstStyle/>
           <a:p>
-            <a:pPr marL="0" indent="0">
-              <a:buNone/>
-            </a:pPr>
-            <a:r>
-              <a:rPr lang="en-US" sz="2800" dirty="0" err="1"/>
-              <a:t>Ključevi</a:t>
-            </a:r>
-            <a:r>
-              <a:rPr lang="en-US" sz="2800" dirty="0"/>
-              <a:t> u </a:t>
-            </a:r>
-            <a:r>
-              <a:rPr lang="en-US" sz="2800" dirty="0" err="1"/>
-              <a:t>bazama</a:t>
-            </a:r>
-            <a:r>
-              <a:rPr lang="en-US" sz="2800" dirty="0"/>
-              <a:t> </a:t>
-            </a:r>
             <a:r>
               <a:rPr lang="en-US" sz="2800" dirty="0" err="1" smtClean="0"/>
-              <a:t>podataka</a:t>
-            </a:r>
-            <a:r>
-              <a:rPr lang="sr-Latn-RS" sz="2800" dirty="0" smtClean="0"/>
-              <a:t>:</a:t>
-            </a:r>
-          </a:p>
-          <a:p>
-            <a:r>
-              <a:rPr lang="en-US" sz="2800" dirty="0" err="1"/>
               <a:t>Primarni</a:t>
             </a:r>
             <a:r>
-              <a:rPr lang="en-US" sz="2800" dirty="0"/>
+              <a:rPr lang="en-US" sz="2800" dirty="0" smtClean="0"/>
               <a:t> </a:t>
             </a:r>
             <a:r>
@@ -8395,11 +8646,15 @@
               <a:t> </a:t>
             </a:r>
             <a:r>
-              <a:rPr lang="en-US" sz="2800" dirty="0" err="1"/>
+              <a:rPr lang="en-US" sz="2800" dirty="0" err="1" smtClean="0"/>
               <a:t>više</a:t>
             </a:r>
             <a:r>
-              <a:rPr lang="en-US" sz="2800" dirty="0"/>
+              <a:rPr lang="sr-Latn-RS" sz="2800" dirty="0" smtClean="0"/>
+              <a:t>                                                 </a:t>
+            </a:r>
+            <a:r>
+              <a:rPr lang="en-US" sz="2800" dirty="0" smtClean="0"/>
               <a:t> </a:t>
             </a:r>
             <a:r>
@@ -8419,12 +8674,20 @@
               <a:t> </a:t>
             </a:r>
             <a:r>
-              <a:rPr lang="en-US" sz="2800" dirty="0" err="1"/>
+              <a:rPr lang="sr-Latn-RS" sz="2800" dirty="0" smtClean="0"/>
+              <a:t>                                       </a:t>
+            </a:r>
+            <a:r>
+              <a:rPr lang="en-US" sz="2800" dirty="0" err="1" smtClean="0"/>
               <a:t>jedinstvenost</a:t>
             </a:r>
             <a:r>
-              <a:rPr lang="en-US" sz="2800" dirty="0"/>
-              <a:t> (</a:t>
+              <a:rPr lang="en-US" sz="2800" dirty="0" smtClean="0"/>
+              <a:t> </a:t>
+            </a:r>
+            <a:r>
+              <a:rPr lang="en-US" sz="2800" dirty="0"/>
+              <a:t>(</a:t>
             </a:r>
             <a:r>
               <a:rPr lang="en-US" sz="2800" dirty="0" err="1"/>
@@ -8440,7 +8703,19 @@
             </a:r>
             <a:r>
               <a:rPr lang="en-US" sz="2800" dirty="0"/>
-              <a:t> sale + </a:t>
+              <a:t> </a:t>
+            </a:r>
+            <a:r>
+              <a:rPr lang="sr-Latn-RS" sz="2800" dirty="0" smtClean="0"/>
+              <a:t>                                                  </a:t>
+            </a:r>
+            <a:r>
+              <a:rPr lang="en-US" sz="2800" dirty="0" smtClean="0"/>
+              <a:t>sale </a:t>
+            </a:r>
+            <a:r>
+              <a:rPr lang="en-US" sz="2800" dirty="0"/>
+              <a:t>+ </a:t>
             </a:r>
             <a:r>
               <a:rPr lang="en-US" sz="2800" dirty="0" err="1"/>
@@ -8461,6 +8736,30 @@
           </a:p>
         </p:txBody>
       </p:sp>
+      <p:pic>
+        <p:nvPicPr>
+          <p:cNvPr id="4" name="Picture 3"/>
+          <p:cNvPicPr>
+            <a:picLocks noChangeAspect="1"/>
+          </p:cNvPicPr>
+          <p:nvPr/>
+        </p:nvPicPr>
+        <p:blipFill>
+          <a:blip r:embed="rId2"/>
+          <a:stretch>
+            <a:fillRect/>
+          </a:stretch>
+        </p:blipFill>
+        <p:spPr>
+          <a:xfrm>
+            <a:off x="6931007" y="3452792"/>
+            <a:ext cx="4108468" cy="2394813"/>
+          </a:xfrm>
+          <a:prstGeom prst="rect">
+            <a:avLst/>
+          </a:prstGeom>
+        </p:spPr>
+      </p:pic>
     </p:spTree>
     <p:extLst>
       <p:ext uri="{BB962C8B-B14F-4D97-AF65-F5344CB8AC3E}">
@@ -8556,8 +8855,8 @@
         </p:nvSpPr>
         <p:spPr>
           <a:xfrm>
-            <a:off x="1868129" y="1986116"/>
-            <a:ext cx="8915400" cy="3777622"/>
+            <a:off x="1868129" y="2114550"/>
+            <a:ext cx="8915400" cy="3649188"/>
           </a:xfrm>
         </p:spPr>
         <p:txBody>
@@ -8713,12 +9012,24 @@
               <a:t> </a:t>
             </a:r>
             <a:r>
-              <a:rPr lang="en-US" sz="2800" dirty="0" err="1"/>
+              <a:rPr lang="en-US" sz="2800" dirty="0" err="1" smtClean="0"/>
               <a:t>interfejsa</a:t>
             </a:r>
             <a:r>
-              <a:rPr lang="en-US" sz="2800" dirty="0"/>
-              <a:t>: Navigator (</a:t>
+              <a:rPr lang="en-US" sz="2800" dirty="0" smtClean="0"/>
+              <a:t>:</a:t>
+            </a:r>
+            <a:r>
+              <a:rPr lang="sr-Latn-RS" sz="2800" dirty="0" smtClean="0"/>
+              <a:t> </a:t>
+            </a:r>
+            <a:r>
+              <a:rPr lang="en-US" sz="2800" dirty="0" smtClean="0"/>
+              <a:t>Navigator </a:t>
+            </a:r>
+            <a:r>
+              <a:rPr lang="en-US" sz="2800" dirty="0"/>
+              <a:t>(</a:t>
             </a:r>
             <a:r>
               <a:rPr lang="en-US" sz="2800" dirty="0" err="1"/>
@@ -8734,7 +9045,15 @@
             </a:r>
             <a:r>
               <a:rPr lang="en-US" sz="2800" dirty="0"/>
-              <a:t>), Editor (</a:t>
+              <a:t>), </a:t>
+            </a:r>
+            <a:r>
+              <a:rPr lang="en-US" sz="2800" dirty="0" smtClean="0"/>
+              <a:t>Editor </a:t>
+            </a:r>
+            <a:r>
+              <a:rPr lang="en-US" sz="2800" dirty="0"/>
+              <a:t>(</a:t>
             </a:r>
             <a:r>
               <a:rPr lang="en-US" sz="2800" dirty="0" err="1"/>
@@ -8753,21 +9072,18 @@
               <a:t>) </a:t>
             </a:r>
             <a:r>
-              <a:rPr lang="en-US" sz="2800" dirty="0" err="1"/>
+              <a:rPr lang="en-US" sz="2800" dirty="0" err="1" smtClean="0"/>
               <a:t>i</a:t>
             </a:r>
             <a:r>
-              <a:rPr lang="en-US" sz="2800" dirty="0"/>
-              <a:t> </a:t>
-            </a:r>
-            <a:r>
-              <a:rPr lang="en-US" sz="2800" dirty="0" err="1"/>
-              <a:t>Alatnica</a:t>
-            </a:r>
-            <a:r>
-              <a:rPr lang="en-US" sz="2800" dirty="0"/>
+              <a:rPr lang="sr-Latn-RS" sz="2800" dirty="0" smtClean="0"/>
+              <a:t> Traka sa alatima</a:t>
+            </a:r>
+            <a:r>
+              <a:rPr lang="en-US" sz="2800" dirty="0" smtClean="0"/>
               <a:t>.</a:t>
             </a:r>
+            <a:endParaRPr lang="en-US" sz="2800" dirty="0"/>
           </a:p>
         </p:txBody>
       </p:sp>
@@ -8832,7 +9148,7 @@
           <a:p>
             <a:r>
               <a:rPr lang="en-US" sz="4000" dirty="0" err="1"/>
-              <a:t>Kreiranje</a:t>
+              <a:t>Planiranje</a:t>
             </a:r>
             <a:r>
               <a:rPr lang="en-US" sz="4000" dirty="0"/>
@@ -8840,17 +9156,17 @@
             </a:r>
             <a:r>
               <a:rPr lang="en-US" sz="4000" dirty="0" err="1"/>
-              <a:t>baza</a:t>
+              <a:t>baze</a:t>
             </a:r>
             <a:r>
               <a:rPr lang="en-US" sz="4000" dirty="0"/>
               <a:t> </a:t>
             </a:r>
             <a:r>
-              <a:rPr lang="en-US" sz="4000" dirty="0" err="1"/>
+              <a:rPr lang="en-US" sz="4000" dirty="0" err="1" smtClean="0"/>
               <a:t>podataka</a:t>
             </a:r>
-            <a:endParaRPr lang="en-US" sz="4000" dirty="0"/>
+            <a:endParaRPr lang="sr-Latn-RS" sz="4000" dirty="0"/>
           </a:p>
         </p:txBody>
       </p:sp>
@@ -8866,7 +9182,7 @@
         </p:nvSpPr>
         <p:spPr>
           <a:xfrm>
-            <a:off x="1868129" y="1986116"/>
+            <a:off x="1868129" y="2024216"/>
             <a:ext cx="8915400" cy="3777622"/>
           </a:xfrm>
         </p:spPr>
@@ -8876,35 +9192,6 @@
           </a:bodyPr>
           <a:lstStyle/>
           <a:p>
-            <a:pPr marL="0" indent="0">
-              <a:buNone/>
-            </a:pPr>
-            <a:r>
-              <a:rPr lang="en-US" sz="2800" dirty="0" err="1"/>
-              <a:t>Planiranje</a:t>
-            </a:r>
-            <a:r>
-              <a:rPr lang="en-US" sz="2800" dirty="0"/>
-              <a:t> </a:t>
-            </a:r>
-            <a:r>
-              <a:rPr lang="en-US" sz="2800" dirty="0" err="1"/>
-              <a:t>baze</a:t>
-            </a:r>
-            <a:r>
-              <a:rPr lang="en-US" sz="2800" dirty="0"/>
-              <a:t> </a:t>
-            </a:r>
-            <a:r>
-              <a:rPr lang="en-US" sz="2800" dirty="0" err="1" smtClean="0"/>
-              <a:t>podataka</a:t>
-            </a:r>
-            <a:r>
-              <a:rPr lang="sr-Latn-RS" sz="2800" dirty="0" smtClean="0"/>
-              <a:t>:</a:t>
-            </a:r>
-          </a:p>
-          <a:p>
             <a:r>
               <a:rPr lang="en-US" sz="2800" dirty="0" err="1" smtClean="0"/>
               <a:t>Najbitnija</a:t>
@@ -8994,43 +9281,47 @@
             </a:r>
             <a:r>
               <a:rPr lang="en-US" sz="2800" dirty="0"/>
-              <a:t> (</a:t>
-            </a:r>
-            <a:r>
-              <a:rPr lang="en-US" sz="2800" dirty="0" err="1"/>
-              <a:t>glavnih</a:t>
-            </a:r>
-            <a:r>
-              <a:rPr lang="en-US" sz="2800" dirty="0"/>
-              <a:t> </a:t>
-            </a:r>
-            <a:r>
-              <a:rPr lang="en-US" sz="2800" dirty="0" err="1"/>
-              <a:t>tema</a:t>
-            </a:r>
-            <a:r>
-              <a:rPr lang="en-US" sz="2800" dirty="0"/>
-              <a:t> o </a:t>
-            </a:r>
-            <a:r>
-              <a:rPr lang="en-US" sz="2800" dirty="0" err="1"/>
-              <a:t>kojima</a:t>
-            </a:r>
-            <a:r>
-              <a:rPr lang="en-US" sz="2800" dirty="0"/>
-              <a:t> </a:t>
-            </a:r>
-            <a:r>
-              <a:rPr lang="en-US" sz="2800" dirty="0" err="1"/>
-              <a:t>čuvamo</a:t>
-            </a:r>
-            <a:r>
-              <a:rPr lang="en-US" sz="2800" dirty="0"/>
-              <a:t> </a:t>
-            </a:r>
-            <a:r>
-              <a:rPr lang="en-US" sz="2800" dirty="0" err="1"/>
-              <a:t>podatke</a:t>
+              <a:t> </a:t>
+            </a:r>
+            <a:r>
+              <a:rPr lang="en-US" sz="2800" dirty="0" smtClean="0"/>
+              <a:t>(</a:t>
+            </a:r>
+            <a:r>
+              <a:rPr lang="en-US" sz="2800" dirty="0" err="1"/>
+              <a:t>ključnih</a:t>
+            </a:r>
+            <a:r>
+              <a:rPr lang="en-US" sz="2800" dirty="0"/>
+              <a:t> </a:t>
+            </a:r>
+            <a:r>
+              <a:rPr lang="en-US" sz="2800" dirty="0" err="1" smtClean="0"/>
+              <a:t>pojmova</a:t>
+            </a:r>
+            <a:r>
+              <a:rPr lang="en-US" sz="2800" dirty="0" smtClean="0"/>
+              <a:t> </a:t>
+            </a:r>
+            <a:r>
+              <a:rPr lang="en-US" sz="2800" dirty="0" err="1"/>
+              <a:t>koje</a:t>
+            </a:r>
+            <a:r>
+              <a:rPr lang="en-US" sz="2800" dirty="0"/>
+              <a:t> </a:t>
+            </a:r>
+            <a:r>
+              <a:rPr lang="en-US" sz="2800" dirty="0" err="1"/>
+              <a:t>baza</a:t>
+            </a:r>
+            <a:r>
+              <a:rPr lang="en-US" sz="2800" dirty="0"/>
+              <a:t> </a:t>
+            </a:r>
+            <a:r>
+              <a:rPr lang="en-US" sz="2800" dirty="0" err="1"/>
+              <a:t>opisuje</a:t>
             </a:r>
             <a:r>
               <a:rPr lang="en-US" sz="2800" dirty="0" smtClean="0"/>
@@ -9159,25 +9450,17 @@
           <a:p>
             <a:r>
               <a:rPr lang="en-US" sz="4000" dirty="0" err="1"/>
-              <a:t>Kreiranje</a:t>
+              <a:t>Korišćenje</a:t>
             </a:r>
             <a:r>
               <a:rPr lang="en-US" sz="4000" dirty="0"/>
               <a:t> </a:t>
             </a:r>
             <a:r>
-              <a:rPr lang="en-US" sz="4000" dirty="0" err="1"/>
-              <a:t>baza</a:t>
-            </a:r>
-            <a:r>
-              <a:rPr lang="en-US" sz="4000" dirty="0"/>
-              <a:t> </a:t>
-            </a:r>
-            <a:r>
-              <a:rPr lang="en-US" sz="4000" dirty="0" err="1"/>
-              <a:t>podataka</a:t>
-            </a:r>
-            <a:endParaRPr lang="en-US" sz="4000" dirty="0"/>
+              <a:rPr lang="en-US" sz="4000" dirty="0" err="1" smtClean="0"/>
+              <a:t>šablona</a:t>
+            </a:r>
+            <a:endParaRPr lang="sr-Latn-RS" sz="4000" dirty="0"/>
           </a:p>
         </p:txBody>
       </p:sp>
@@ -9203,27 +9486,6 @@
           </a:bodyPr>
           <a:lstStyle/>
           <a:p>
-            <a:pPr marL="0" indent="0">
-              <a:buNone/>
-            </a:pPr>
-            <a:r>
-              <a:rPr lang="en-US" sz="2800" dirty="0" err="1"/>
-              <a:t>Korišćenje</a:t>
-            </a:r>
-            <a:r>
-              <a:rPr lang="en-US" sz="2800" dirty="0"/>
-              <a:t> </a:t>
-            </a:r>
-            <a:r>
-              <a:rPr lang="en-US" sz="2800" dirty="0" err="1" smtClean="0"/>
-              <a:t>šablona</a:t>
-            </a:r>
-            <a:r>
-              <a:rPr lang="sr-Latn-RS" sz="2800" dirty="0" smtClean="0"/>
-              <a:t>:</a:t>
-            </a:r>
-          </a:p>
-          <a:p>
             <a:r>
               <a:rPr lang="en-US" sz="2800" dirty="0" err="1" smtClean="0"/>
               <a:t>Unapred</a:t>
@@ -9241,11 +9503,15 @@
               <a:t> </a:t>
             </a:r>
             <a:r>
-              <a:rPr lang="en-US" sz="2800" dirty="0" err="1"/>
+              <a:rPr lang="en-US" sz="2800" dirty="0" err="1" smtClean="0"/>
               <a:t>baze</a:t>
             </a:r>
             <a:r>
-              <a:rPr lang="en-US" sz="2800" dirty="0"/>
+              <a:rPr lang="sr-Latn-RS" sz="2800" dirty="0" smtClean="0"/>
+              <a:t>                                                                              </a:t>
+            </a:r>
+            <a:r>
+              <a:rPr lang="en-US" sz="2800" dirty="0" smtClean="0"/>
               <a:t> </a:t>
             </a:r>
             <a:r>
@@ -9273,11 +9539,15 @@
               <a:t> </a:t>
             </a:r>
             <a:r>
-              <a:rPr lang="en-US" sz="2800" dirty="0" err="1"/>
+              <a:rPr lang="sr-Latn-RS" sz="2800" dirty="0" smtClean="0"/>
+              <a:t>                                        </a:t>
+            </a:r>
+            <a:r>
+              <a:rPr lang="en-US" sz="2800" dirty="0" err="1" smtClean="0"/>
               <a:t>početak</a:t>
             </a:r>
             <a:r>
-              <a:rPr lang="en-US" sz="2800" dirty="0"/>
+              <a:rPr lang="en-US" sz="2800" dirty="0" smtClean="0"/>
               <a:t> </a:t>
             </a:r>
             <a:r>
@@ -9441,6 +9711,28 @@
           </a:p>
         </p:txBody>
       </p:sp>
+      <p:pic>
+        <p:nvPicPr>
+          <p:cNvPr id="4" name="Picture 3"/>
+          <p:cNvPicPr/>
+          <p:nvPr/>
+        </p:nvPicPr>
+        <p:blipFill>
+          <a:blip r:embed="rId2"/>
+          <a:stretch>
+            <a:fillRect/>
+          </a:stretch>
+        </p:blipFill>
+        <p:spPr>
+          <a:xfrm>
+            <a:off x="7489052" y="739299"/>
+            <a:ext cx="4015560" cy="2331402"/>
+          </a:xfrm>
+          <a:prstGeom prst="rect">
+            <a:avLst/>
+          </a:prstGeom>
+        </p:spPr>
+      </p:pic>
     </p:spTree>
     <p:extLst>
       <p:ext uri="{BB962C8B-B14F-4D97-AF65-F5344CB8AC3E}">
@@ -9501,10 +9793,26 @@
           <a:lstStyle/>
           <a:p>
             <a:r>
-              <a:rPr lang="sr-Latn-RS" sz="4000" dirty="0" smtClean="0"/>
-              <a:t>Rad s tabelama</a:t>
-            </a:r>
-            <a:endParaRPr lang="en-US" sz="4000" dirty="0"/>
+              <a:rPr lang="en-US" sz="4000" dirty="0" err="1"/>
+              <a:t>Kreiranje</a:t>
+            </a:r>
+            <a:r>
+              <a:rPr lang="en-US" sz="4000" dirty="0"/>
+              <a:t> </a:t>
+            </a:r>
+            <a:r>
+              <a:rPr lang="en-US" sz="4000" dirty="0" err="1"/>
+              <a:t>tabela</a:t>
+            </a:r>
+            <a:r>
+              <a:rPr lang="en-US" sz="4000" dirty="0"/>
+              <a:t> u Microsoft </a:t>
+            </a:r>
+            <a:r>
+              <a:rPr lang="en-US" sz="4000" dirty="0" smtClean="0"/>
+              <a:t>Access-u</a:t>
+            </a:r>
+            <a:endParaRPr lang="sr-Latn-RS" sz="4000" dirty="0"/>
           </a:p>
         </p:txBody>
       </p:sp>
@@ -9530,35 +9838,6 @@
           </a:bodyPr>
           <a:lstStyle/>
           <a:p>
-            <a:pPr marL="0" indent="0">
-              <a:buNone/>
-            </a:pPr>
-            <a:r>
-              <a:rPr lang="en-US" sz="2800" dirty="0" err="1"/>
-              <a:t>Kreiranje</a:t>
-            </a:r>
-            <a:r>
-              <a:rPr lang="en-US" sz="2800" dirty="0"/>
-              <a:t> </a:t>
-            </a:r>
-            <a:r>
-              <a:rPr lang="en-US" sz="2800" dirty="0" err="1"/>
-              <a:t>tabela</a:t>
-            </a:r>
-            <a:r>
-              <a:rPr lang="en-US" sz="2800" dirty="0"/>
-              <a:t> u Microsoft </a:t>
-            </a:r>
-            <a:r>
-              <a:rPr lang="en-US" sz="2800" dirty="0" smtClean="0"/>
-              <a:t>Access-u</a:t>
-            </a:r>
-            <a:r>
-              <a:rPr lang="sr-Latn-RS" sz="2800" dirty="0" smtClean="0"/>
-              <a:t>:</a:t>
-            </a:r>
-          </a:p>
-          <a:p>
             <a:r>
               <a:rPr lang="en-US" sz="2800" dirty="0" err="1" smtClean="0"/>
               <a:t>Dva</a:t>
@@ -9722,8 +10001,12 @@
               <a:t> </a:t>
             </a:r>
             <a:r>
-              <a:rPr lang="en-US" sz="2800" dirty="0" err="1"/>
+              <a:rPr lang="en-US" sz="2800" dirty="0" err="1" smtClean="0"/>
               <a:t>ključ</a:t>
+            </a:r>
+            <a:r>
+              <a:rPr lang="sr-Latn-RS" sz="2800" dirty="0" smtClean="0"/>
+              <a:t>.</a:t>
             </a:r>
             <a:endParaRPr lang="en-US" sz="2800" dirty="0"/>
           </a:p>
@@ -9789,10 +10072,25 @@
           <a:lstStyle/>
           <a:p>
             <a:r>
-              <a:rPr lang="sr-Latn-RS" sz="4000" dirty="0" smtClean="0"/>
-              <a:t>Rad s tabelama</a:t>
-            </a:r>
-            <a:endParaRPr lang="en-US" sz="4000" dirty="0"/>
+              <a:rPr lang="en-US" sz="4000" dirty="0" err="1"/>
+              <a:t>Tipovi</a:t>
+            </a:r>
+            <a:r>
+              <a:rPr lang="en-US" sz="4000" dirty="0"/>
+              <a:t> </a:t>
+            </a:r>
+            <a:r>
+              <a:rPr lang="en-US" sz="4000" dirty="0" err="1"/>
+              <a:t>podataka</a:t>
+            </a:r>
+            <a:r>
+              <a:rPr lang="en-US" sz="4000" dirty="0"/>
+              <a:t> (Data Type)</a:t>
+            </a:r>
+            <a:r>
+              <a:rPr lang="sr-Latn-RS" sz="4000" dirty="0"/>
+              <a:t>:</a:t>
+            </a:r>
           </a:p>
         </p:txBody>
       </p:sp>
@@ -9808,8 +10106,8 @@
         </p:nvSpPr>
         <p:spPr>
           <a:xfrm>
-            <a:off x="1868129" y="1986116"/>
-            <a:ext cx="8915400" cy="3777622"/>
+            <a:off x="1868128" y="1533525"/>
+            <a:ext cx="9752371" cy="4230213"/>
           </a:xfrm>
         </p:spPr>
         <p:txBody>
@@ -9818,35 +10116,6 @@
           </a:bodyPr>
           <a:lstStyle/>
           <a:p>
-            <a:pPr marL="0" indent="0">
-              <a:buNone/>
-            </a:pPr>
-            <a:r>
-              <a:rPr lang="en-US" sz="2800" dirty="0" err="1"/>
-              <a:t>Tipovi</a:t>
-            </a:r>
-            <a:r>
-              <a:rPr lang="en-US" sz="2800" dirty="0"/>
-              <a:t> </a:t>
-            </a:r>
-            <a:r>
-              <a:rPr lang="en-US" sz="2800" dirty="0" err="1"/>
-              <a:t>podataka</a:t>
-            </a:r>
-            <a:r>
-              <a:rPr lang="en-US" sz="2800" dirty="0"/>
-              <a:t> (Data Type</a:t>
-            </a:r>
-            <a:r>
-              <a:rPr lang="en-US" sz="2800" dirty="0" smtClean="0"/>
-              <a:t>)</a:t>
-            </a:r>
-            <a:r>
-              <a:rPr lang="sr-Latn-RS" sz="2800" dirty="0" smtClean="0"/>
-              <a:t>:</a:t>
-            </a:r>
-          </a:p>
-          <a:p>
             <a:r>
               <a:rPr lang="en-US" sz="2800" dirty="0" smtClean="0"/>
               <a:t>Short </a:t>
@@ -10036,6 +10305,795 @@
           </a:p>
         </p:txBody>
       </p:sp>
+      <p:graphicFrame>
+        <p:nvGraphicFramePr>
+          <p:cNvPr id="4" name="Table 3"/>
+          <p:cNvGraphicFramePr>
+            <a:graphicFrameLocks noGrp="1"/>
+          </p:cNvGraphicFramePr>
+          <p:nvPr>
+            <p:extLst>
+              <p:ext uri="{D42A27DB-BD31-4B8C-83A1-F6EECF244321}">
+                <p14:modId xmlns:p14="http://schemas.microsoft.com/office/powerpoint/2010/main" val="3143024430"/>
+              </p:ext>
+            </p:extLst>
+          </p:nvPr>
+        </p:nvGraphicFramePr>
+        <p:xfrm>
+          <a:off x="2857501" y="4314823"/>
+          <a:ext cx="7362824" cy="2072278"/>
+        </p:xfrm>
+        <a:graphic>
+          <a:graphicData uri="http://schemas.openxmlformats.org/drawingml/2006/table">
+            <a:tbl>
+              <a:tblPr firstRow="1" firstCol="1" bandRow="1">
+                <a:tableStyleId>{5C22544A-7EE6-4342-B048-85BDC9FD1C3A}</a:tableStyleId>
+              </a:tblPr>
+              <a:tblGrid>
+                <a:gridCol w="1472212">
+                  <a:extLst>
+                    <a:ext uri="{9D8B030D-6E8A-4147-A177-3AD203B41FA5}">
+                      <a16:colId xmlns:a16="http://schemas.microsoft.com/office/drawing/2014/main" val="2134330895"/>
+                    </a:ext>
+                  </a:extLst>
+                </a:gridCol>
+                <a:gridCol w="3062695">
+                  <a:extLst>
+                    <a:ext uri="{9D8B030D-6E8A-4147-A177-3AD203B41FA5}">
+                      <a16:colId xmlns:a16="http://schemas.microsoft.com/office/drawing/2014/main" val="1026180620"/>
+                    </a:ext>
+                  </a:extLst>
+                </a:gridCol>
+                <a:gridCol w="2827917">
+                  <a:extLst>
+                    <a:ext uri="{9D8B030D-6E8A-4147-A177-3AD203B41FA5}">
+                      <a16:colId xmlns:a16="http://schemas.microsoft.com/office/drawing/2014/main" val="3347017927"/>
+                    </a:ext>
+                  </a:extLst>
+                </a:gridCol>
+              </a:tblGrid>
+              <a:tr h="289358">
+                <a:tc>
+                  <a:txBody>
+                    <a:bodyPr/>
+                    <a:lstStyle/>
+                    <a:p>
+                      <a:pPr marL="168275" indent="-168275" algn="l">
+                        <a:lnSpc>
+                          <a:spcPct val="107000"/>
+                        </a:lnSpc>
+                        <a:spcAft>
+                          <a:spcPts val="0"/>
+                        </a:spcAft>
+                      </a:pPr>
+                      <a:r>
+                        <a:rPr lang="en-US" sz="1400">
+                          <a:effectLst/>
+                        </a:rPr>
+                        <a:t>Tip podataka</a:t>
+                      </a:r>
+                      <a:endParaRPr lang="en-US" sz="1400">
+                        <a:solidFill>
+                          <a:srgbClr val="000000"/>
+                        </a:solidFill>
+                        <a:effectLst/>
+                        <a:latin typeface="Calibri" panose="020F0502020204030204" pitchFamily="34" charset="0"/>
+                        <a:ea typeface="Calibri" panose="020F0502020204030204" pitchFamily="34" charset="0"/>
+                        <a:cs typeface="Times New Roman" panose="02020603050405020304" pitchFamily="18" charset="0"/>
+                      </a:endParaRPr>
+                    </a:p>
+                  </a:txBody>
+                  <a:tcPr marL="40640" marR="37465" marT="10160" marB="0"/>
+                </a:tc>
+                <a:tc>
+                  <a:txBody>
+                    <a:bodyPr/>
+                    <a:lstStyle/>
+                    <a:p>
+                      <a:pPr marL="168275" indent="-168275" algn="l">
+                        <a:lnSpc>
+                          <a:spcPct val="107000"/>
+                        </a:lnSpc>
+                        <a:spcAft>
+                          <a:spcPts val="0"/>
+                        </a:spcAft>
+                      </a:pPr>
+                      <a:r>
+                        <a:rPr lang="en-US" sz="1400">
+                          <a:effectLst/>
+                        </a:rPr>
+                        <a:t>Namena</a:t>
+                      </a:r>
+                      <a:endParaRPr lang="en-US" sz="1400">
+                        <a:solidFill>
+                          <a:srgbClr val="000000"/>
+                        </a:solidFill>
+                        <a:effectLst/>
+                        <a:latin typeface="Calibri" panose="020F0502020204030204" pitchFamily="34" charset="0"/>
+                        <a:ea typeface="Calibri" panose="020F0502020204030204" pitchFamily="34" charset="0"/>
+                        <a:cs typeface="Times New Roman" panose="02020603050405020304" pitchFamily="18" charset="0"/>
+                      </a:endParaRPr>
+                    </a:p>
+                  </a:txBody>
+                  <a:tcPr marL="40640" marR="37465" marT="10160" marB="0"/>
+                </a:tc>
+                <a:tc>
+                  <a:txBody>
+                    <a:bodyPr/>
+                    <a:lstStyle/>
+                    <a:p>
+                      <a:pPr marL="168275" indent="-168275" algn="l">
+                        <a:lnSpc>
+                          <a:spcPct val="107000"/>
+                        </a:lnSpc>
+                        <a:spcAft>
+                          <a:spcPts val="0"/>
+                        </a:spcAft>
+                      </a:pPr>
+                      <a:r>
+                        <a:rPr lang="en-US" sz="1400">
+                          <a:effectLst/>
+                        </a:rPr>
+                        <a:t>Primer iz našeg zadatka</a:t>
+                      </a:r>
+                      <a:endParaRPr lang="en-US" sz="1400">
+                        <a:solidFill>
+                          <a:srgbClr val="000000"/>
+                        </a:solidFill>
+                        <a:effectLst/>
+                        <a:latin typeface="Calibri" panose="020F0502020204030204" pitchFamily="34" charset="0"/>
+                        <a:ea typeface="Calibri" panose="020F0502020204030204" pitchFamily="34" charset="0"/>
+                        <a:cs typeface="Times New Roman" panose="02020603050405020304" pitchFamily="18" charset="0"/>
+                      </a:endParaRPr>
+                    </a:p>
+                  </a:txBody>
+                  <a:tcPr marL="40640" marR="37465" marT="10160" marB="0"/>
+                </a:tc>
+                <a:extLst>
+                  <a:ext uri="{0D108BD9-81ED-4DB2-BD59-A6C34878D82A}">
+                    <a16:rowId xmlns:a16="http://schemas.microsoft.com/office/drawing/2014/main" val="1408620896"/>
+                  </a:ext>
+                </a:extLst>
+              </a:tr>
+              <a:tr h="625044">
+                <a:tc>
+                  <a:txBody>
+                    <a:bodyPr/>
+                    <a:lstStyle/>
+                    <a:p>
+                      <a:pPr marL="168275" indent="-168275" algn="l">
+                        <a:lnSpc>
+                          <a:spcPct val="107000"/>
+                        </a:lnSpc>
+                        <a:spcAft>
+                          <a:spcPts val="0"/>
+                        </a:spcAft>
+                      </a:pPr>
+                      <a:r>
+                        <a:rPr lang="en-US" sz="1400">
+                          <a:effectLst/>
+                        </a:rPr>
+                        <a:t>Short Text</a:t>
+                      </a:r>
+                      <a:endParaRPr lang="en-US" sz="1400">
+                        <a:solidFill>
+                          <a:srgbClr val="000000"/>
+                        </a:solidFill>
+                        <a:effectLst/>
+                        <a:latin typeface="Calibri" panose="020F0502020204030204" pitchFamily="34" charset="0"/>
+                        <a:ea typeface="Calibri" panose="020F0502020204030204" pitchFamily="34" charset="0"/>
+                        <a:cs typeface="Times New Roman" panose="02020603050405020304" pitchFamily="18" charset="0"/>
+                      </a:endParaRPr>
+                    </a:p>
+                  </a:txBody>
+                  <a:tcPr marL="40640" marR="37465" marT="10160" marB="0"/>
+                </a:tc>
+                <a:tc>
+                  <a:txBody>
+                    <a:bodyPr/>
+                    <a:lstStyle/>
+                    <a:p>
+                      <a:pPr marL="168275" indent="-168275" algn="l">
+                        <a:lnSpc>
+                          <a:spcPct val="107000"/>
+                        </a:lnSpc>
+                        <a:spcAft>
+                          <a:spcPts val="0"/>
+                        </a:spcAft>
+                      </a:pPr>
+                      <a:r>
+                        <a:rPr lang="en-US" sz="1400" dirty="0" err="1">
+                          <a:effectLst/>
+                        </a:rPr>
+                        <a:t>Tekstualni</a:t>
+                      </a:r>
+                      <a:r>
+                        <a:rPr lang="en-US" sz="1400" dirty="0">
+                          <a:effectLst/>
+                        </a:rPr>
+                        <a:t> </a:t>
+                      </a:r>
+                      <a:r>
+                        <a:rPr lang="en-US" sz="1400" dirty="0" err="1">
+                          <a:effectLst/>
+                        </a:rPr>
+                        <a:t>podaci</a:t>
+                      </a:r>
+                      <a:r>
+                        <a:rPr lang="en-US" sz="1400" dirty="0">
+                          <a:effectLst/>
+                        </a:rPr>
+                        <a:t> do 255 </a:t>
+                      </a:r>
+                      <a:r>
+                        <a:rPr lang="en-US" sz="1400" dirty="0" err="1">
+                          <a:effectLst/>
+                        </a:rPr>
+                        <a:t>karaktera</a:t>
+                      </a:r>
+                      <a:endParaRPr lang="en-US" sz="1400" dirty="0">
+                        <a:solidFill>
+                          <a:srgbClr val="000000"/>
+                        </a:solidFill>
+                        <a:effectLst/>
+                        <a:latin typeface="Calibri" panose="020F0502020204030204" pitchFamily="34" charset="0"/>
+                        <a:ea typeface="Calibri" panose="020F0502020204030204" pitchFamily="34" charset="0"/>
+                        <a:cs typeface="Times New Roman" panose="02020603050405020304" pitchFamily="18" charset="0"/>
+                      </a:endParaRPr>
+                    </a:p>
+                  </a:txBody>
+                  <a:tcPr marL="40640" marR="37465" marT="10160" marB="0"/>
+                </a:tc>
+                <a:tc>
+                  <a:txBody>
+                    <a:bodyPr/>
+                    <a:lstStyle/>
+                    <a:p>
+                      <a:pPr marL="168275" indent="-168275" algn="l">
+                        <a:lnSpc>
+                          <a:spcPct val="107000"/>
+                        </a:lnSpc>
+                        <a:spcAft>
+                          <a:spcPts val="0"/>
+                        </a:spcAft>
+                      </a:pPr>
+                      <a:r>
+                        <a:rPr lang="en-US" sz="1400">
+                          <a:effectLst/>
+                        </a:rPr>
+                        <a:t>Polja Marka i Klasa</a:t>
+                      </a:r>
+                      <a:endParaRPr lang="en-US" sz="1400">
+                        <a:solidFill>
+                          <a:srgbClr val="000000"/>
+                        </a:solidFill>
+                        <a:effectLst/>
+                        <a:latin typeface="Calibri" panose="020F0502020204030204" pitchFamily="34" charset="0"/>
+                        <a:ea typeface="Calibri" panose="020F0502020204030204" pitchFamily="34" charset="0"/>
+                        <a:cs typeface="Times New Roman" panose="02020603050405020304" pitchFamily="18" charset="0"/>
+                      </a:endParaRPr>
+                    </a:p>
+                  </a:txBody>
+                  <a:tcPr marL="40640" marR="37465" marT="10160" marB="0"/>
+                </a:tc>
+                <a:extLst>
+                  <a:ext uri="{0D108BD9-81ED-4DB2-BD59-A6C34878D82A}">
+                    <a16:rowId xmlns:a16="http://schemas.microsoft.com/office/drawing/2014/main" val="251424144"/>
+                  </a:ext>
+                </a:extLst>
+              </a:tr>
+              <a:tr h="289469">
+                <a:tc>
+                  <a:txBody>
+                    <a:bodyPr/>
+                    <a:lstStyle/>
+                    <a:p>
+                      <a:pPr marL="168275" indent="-168275" algn="l">
+                        <a:lnSpc>
+                          <a:spcPct val="107000"/>
+                        </a:lnSpc>
+                        <a:spcAft>
+                          <a:spcPts val="0"/>
+                        </a:spcAft>
+                      </a:pPr>
+                      <a:r>
+                        <a:rPr lang="en-US" sz="1400">
+                          <a:effectLst/>
+                        </a:rPr>
+                        <a:t>Number</a:t>
+                      </a:r>
+                      <a:endParaRPr lang="en-US" sz="1400">
+                        <a:solidFill>
+                          <a:srgbClr val="000000"/>
+                        </a:solidFill>
+                        <a:effectLst/>
+                        <a:latin typeface="Calibri" panose="020F0502020204030204" pitchFamily="34" charset="0"/>
+                        <a:ea typeface="Calibri" panose="020F0502020204030204" pitchFamily="34" charset="0"/>
+                        <a:cs typeface="Times New Roman" panose="02020603050405020304" pitchFamily="18" charset="0"/>
+                      </a:endParaRPr>
+                    </a:p>
+                  </a:txBody>
+                  <a:tcPr marL="40640" marR="37465" marT="10160" marB="0"/>
+                </a:tc>
+                <a:tc>
+                  <a:txBody>
+                    <a:bodyPr/>
+                    <a:lstStyle/>
+                    <a:p>
+                      <a:pPr marL="168275" indent="-168275" algn="l">
+                        <a:lnSpc>
+                          <a:spcPct val="107000"/>
+                        </a:lnSpc>
+                        <a:spcAft>
+                          <a:spcPts val="0"/>
+                        </a:spcAft>
+                      </a:pPr>
+                      <a:r>
+                        <a:rPr lang="en-US" sz="1400" dirty="0" err="1">
+                          <a:effectLst/>
+                        </a:rPr>
+                        <a:t>Brojne</a:t>
+                      </a:r>
+                      <a:r>
+                        <a:rPr lang="en-US" sz="1400" dirty="0">
+                          <a:effectLst/>
+                        </a:rPr>
+                        <a:t> </a:t>
+                      </a:r>
+                      <a:r>
+                        <a:rPr lang="en-US" sz="1400" dirty="0" err="1">
+                          <a:effectLst/>
+                        </a:rPr>
+                        <a:t>vrednosti</a:t>
+                      </a:r>
+                      <a:r>
+                        <a:rPr lang="en-US" sz="1400" dirty="0">
+                          <a:effectLst/>
+                        </a:rPr>
+                        <a:t> </a:t>
+                      </a:r>
+                      <a:r>
+                        <a:rPr lang="en-US" sz="1400" dirty="0" err="1">
+                          <a:effectLst/>
+                        </a:rPr>
+                        <a:t>za</a:t>
+                      </a:r>
+                      <a:r>
+                        <a:rPr lang="en-US" sz="1400" dirty="0">
+                          <a:effectLst/>
+                        </a:rPr>
+                        <a:t> </a:t>
+                      </a:r>
+                      <a:r>
+                        <a:rPr lang="en-US" sz="1400" dirty="0" err="1">
+                          <a:effectLst/>
+                        </a:rPr>
+                        <a:t>proračune</a:t>
+                      </a:r>
+                      <a:endParaRPr lang="en-US" sz="1400" dirty="0">
+                        <a:solidFill>
+                          <a:srgbClr val="000000"/>
+                        </a:solidFill>
+                        <a:effectLst/>
+                        <a:latin typeface="Calibri" panose="020F0502020204030204" pitchFamily="34" charset="0"/>
+                        <a:ea typeface="Calibri" panose="020F0502020204030204" pitchFamily="34" charset="0"/>
+                        <a:cs typeface="Times New Roman" panose="02020603050405020304" pitchFamily="18" charset="0"/>
+                      </a:endParaRPr>
+                    </a:p>
+                  </a:txBody>
+                  <a:tcPr marL="40640" marR="37465" marT="10160" marB="0"/>
+                </a:tc>
+                <a:tc>
+                  <a:txBody>
+                    <a:bodyPr/>
+                    <a:lstStyle/>
+                    <a:p>
+                      <a:pPr marL="168275" indent="-168275" algn="l">
+                        <a:lnSpc>
+                          <a:spcPct val="107000"/>
+                        </a:lnSpc>
+                        <a:spcAft>
+                          <a:spcPts val="0"/>
+                        </a:spcAft>
+                      </a:pPr>
+                      <a:r>
+                        <a:rPr lang="en-US" sz="1400">
+                          <a:effectLst/>
+                        </a:rPr>
+                        <a:t>Broj sedišta ili kubikaža</a:t>
+                      </a:r>
+                      <a:endParaRPr lang="en-US" sz="1400">
+                        <a:solidFill>
+                          <a:srgbClr val="000000"/>
+                        </a:solidFill>
+                        <a:effectLst/>
+                        <a:latin typeface="Calibri" panose="020F0502020204030204" pitchFamily="34" charset="0"/>
+                        <a:ea typeface="Calibri" panose="020F0502020204030204" pitchFamily="34" charset="0"/>
+                        <a:cs typeface="Times New Roman" panose="02020603050405020304" pitchFamily="18" charset="0"/>
+                      </a:endParaRPr>
+                    </a:p>
+                  </a:txBody>
+                  <a:tcPr marL="40640" marR="37465" marT="10160" marB="0"/>
+                </a:tc>
+                <a:extLst>
+                  <a:ext uri="{0D108BD9-81ED-4DB2-BD59-A6C34878D82A}">
+                    <a16:rowId xmlns:a16="http://schemas.microsoft.com/office/drawing/2014/main" val="2828071754"/>
+                  </a:ext>
+                </a:extLst>
+              </a:tr>
+              <a:tr h="289469">
+                <a:tc>
+                  <a:txBody>
+                    <a:bodyPr/>
+                    <a:lstStyle/>
+                    <a:p>
+                      <a:pPr marL="168275" indent="-168275" algn="l">
+                        <a:lnSpc>
+                          <a:spcPct val="107000"/>
+                        </a:lnSpc>
+                        <a:spcAft>
+                          <a:spcPts val="0"/>
+                        </a:spcAft>
+                      </a:pPr>
+                      <a:r>
+                        <a:rPr lang="en-US" sz="1400">
+                          <a:effectLst/>
+                        </a:rPr>
+                        <a:t>AutoNumber</a:t>
+                      </a:r>
+                      <a:endParaRPr lang="en-US" sz="1400">
+                        <a:solidFill>
+                          <a:srgbClr val="000000"/>
+                        </a:solidFill>
+                        <a:effectLst/>
+                        <a:latin typeface="Calibri" panose="020F0502020204030204" pitchFamily="34" charset="0"/>
+                        <a:ea typeface="Calibri" panose="020F0502020204030204" pitchFamily="34" charset="0"/>
+                        <a:cs typeface="Times New Roman" panose="02020603050405020304" pitchFamily="18" charset="0"/>
+                      </a:endParaRPr>
+                    </a:p>
+                  </a:txBody>
+                  <a:tcPr marL="40640" marR="37465" marT="10160" marB="0"/>
+                </a:tc>
+                <a:tc>
+                  <a:txBody>
+                    <a:bodyPr/>
+                    <a:lstStyle/>
+                    <a:p>
+                      <a:pPr marL="168275" indent="-168275" algn="l">
+                        <a:lnSpc>
+                          <a:spcPct val="107000"/>
+                        </a:lnSpc>
+                        <a:spcAft>
+                          <a:spcPts val="0"/>
+                        </a:spcAft>
+                      </a:pPr>
+                      <a:r>
+                        <a:rPr lang="en-US" sz="1400" dirty="0" err="1">
+                          <a:effectLst/>
+                        </a:rPr>
+                        <a:t>Automatski</a:t>
+                      </a:r>
+                      <a:r>
+                        <a:rPr lang="en-US" sz="1400" dirty="0">
+                          <a:effectLst/>
+                        </a:rPr>
+                        <a:t> </a:t>
+                      </a:r>
+                      <a:r>
+                        <a:rPr lang="en-US" sz="1400" dirty="0" err="1">
+                          <a:effectLst/>
+                        </a:rPr>
+                        <a:t>generisan</a:t>
+                      </a:r>
+                      <a:r>
+                        <a:rPr lang="en-US" sz="1400" dirty="0">
+                          <a:effectLst/>
+                        </a:rPr>
+                        <a:t> </a:t>
+                      </a:r>
+                      <a:r>
+                        <a:rPr lang="en-US" sz="1400" dirty="0" err="1">
+                          <a:effectLst/>
+                        </a:rPr>
+                        <a:t>broj</a:t>
+                      </a:r>
+                      <a:endParaRPr lang="en-US" sz="1400" dirty="0">
+                        <a:solidFill>
+                          <a:srgbClr val="000000"/>
+                        </a:solidFill>
+                        <a:effectLst/>
+                        <a:latin typeface="Calibri" panose="020F0502020204030204" pitchFamily="34" charset="0"/>
+                        <a:ea typeface="Calibri" panose="020F0502020204030204" pitchFamily="34" charset="0"/>
+                        <a:cs typeface="Times New Roman" panose="02020603050405020304" pitchFamily="18" charset="0"/>
+                      </a:endParaRPr>
+                    </a:p>
+                  </a:txBody>
+                  <a:tcPr marL="40640" marR="37465" marT="10160" marB="0"/>
+                </a:tc>
+                <a:tc>
+                  <a:txBody>
+                    <a:bodyPr/>
+                    <a:lstStyle/>
+                    <a:p>
+                      <a:pPr marL="168275" indent="-168275" algn="l">
+                        <a:lnSpc>
+                          <a:spcPct val="107000"/>
+                        </a:lnSpc>
+                        <a:spcAft>
+                          <a:spcPts val="0"/>
+                        </a:spcAft>
+                      </a:pPr>
+                      <a:r>
+                        <a:rPr lang="en-US" sz="1400">
+                          <a:effectLst/>
+                        </a:rPr>
+                        <a:t>Veštački primarni ključ (ID)</a:t>
+                      </a:r>
+                      <a:endParaRPr lang="en-US" sz="1400">
+                        <a:solidFill>
+                          <a:srgbClr val="000000"/>
+                        </a:solidFill>
+                        <a:effectLst/>
+                        <a:latin typeface="Calibri" panose="020F0502020204030204" pitchFamily="34" charset="0"/>
+                        <a:ea typeface="Calibri" panose="020F0502020204030204" pitchFamily="34" charset="0"/>
+                        <a:cs typeface="Times New Roman" panose="02020603050405020304" pitchFamily="18" charset="0"/>
+                      </a:endParaRPr>
+                    </a:p>
+                  </a:txBody>
+                  <a:tcPr marL="40640" marR="37465" marT="10160" marB="0"/>
+                </a:tc>
+                <a:extLst>
+                  <a:ext uri="{0D108BD9-81ED-4DB2-BD59-A6C34878D82A}">
+                    <a16:rowId xmlns:a16="http://schemas.microsoft.com/office/drawing/2014/main" val="873738116"/>
+                  </a:ext>
+                </a:extLst>
+              </a:tr>
+              <a:tr h="289469">
+                <a:tc>
+                  <a:txBody>
+                    <a:bodyPr/>
+                    <a:lstStyle/>
+                    <a:p>
+                      <a:pPr marL="168275" indent="-168275" algn="l">
+                        <a:lnSpc>
+                          <a:spcPct val="107000"/>
+                        </a:lnSpc>
+                        <a:spcAft>
+                          <a:spcPts val="0"/>
+                        </a:spcAft>
+                      </a:pPr>
+                      <a:r>
+                        <a:rPr lang="en-US" sz="1400">
+                          <a:effectLst/>
+                        </a:rPr>
+                        <a:t>Date/Time</a:t>
+                      </a:r>
+                      <a:endParaRPr lang="en-US" sz="1400">
+                        <a:solidFill>
+                          <a:srgbClr val="000000"/>
+                        </a:solidFill>
+                        <a:effectLst/>
+                        <a:latin typeface="Calibri" panose="020F0502020204030204" pitchFamily="34" charset="0"/>
+                        <a:ea typeface="Calibri" panose="020F0502020204030204" pitchFamily="34" charset="0"/>
+                        <a:cs typeface="Times New Roman" panose="02020603050405020304" pitchFamily="18" charset="0"/>
+                      </a:endParaRPr>
+                    </a:p>
+                  </a:txBody>
+                  <a:tcPr marL="40640" marR="37465" marT="10160" marB="0"/>
+                </a:tc>
+                <a:tc>
+                  <a:txBody>
+                    <a:bodyPr/>
+                    <a:lstStyle/>
+                    <a:p>
+                      <a:pPr marL="168275" indent="-168275" algn="l">
+                        <a:lnSpc>
+                          <a:spcPct val="107000"/>
+                        </a:lnSpc>
+                        <a:spcAft>
+                          <a:spcPts val="0"/>
+                        </a:spcAft>
+                      </a:pPr>
+                      <a:r>
+                        <a:rPr lang="en-US" sz="1400">
+                          <a:effectLst/>
+                        </a:rPr>
+                        <a:t>Datumi i vremenske odrednice</a:t>
+                      </a:r>
+                      <a:endParaRPr lang="en-US" sz="1400">
+                        <a:solidFill>
+                          <a:srgbClr val="000000"/>
+                        </a:solidFill>
+                        <a:effectLst/>
+                        <a:latin typeface="Calibri" panose="020F0502020204030204" pitchFamily="34" charset="0"/>
+                        <a:ea typeface="Calibri" panose="020F0502020204030204" pitchFamily="34" charset="0"/>
+                        <a:cs typeface="Times New Roman" panose="02020603050405020304" pitchFamily="18" charset="0"/>
+                      </a:endParaRPr>
+                    </a:p>
+                  </a:txBody>
+                  <a:tcPr marL="40640" marR="37465" marT="10160" marB="0"/>
+                </a:tc>
+                <a:tc>
+                  <a:txBody>
+                    <a:bodyPr/>
+                    <a:lstStyle/>
+                    <a:p>
+                      <a:pPr marL="168275" indent="-168275" algn="l">
+                        <a:lnSpc>
+                          <a:spcPct val="107000"/>
+                        </a:lnSpc>
+                        <a:spcAft>
+                          <a:spcPts val="0"/>
+                        </a:spcAft>
+                      </a:pPr>
+                      <a:r>
+                        <a:rPr lang="en-US" sz="1400">
+                          <a:effectLst/>
+                        </a:rPr>
+                        <a:t>Datum poslednje popravke</a:t>
+                      </a:r>
+                      <a:endParaRPr lang="en-US" sz="1400">
+                        <a:solidFill>
+                          <a:srgbClr val="000000"/>
+                        </a:solidFill>
+                        <a:effectLst/>
+                        <a:latin typeface="Calibri" panose="020F0502020204030204" pitchFamily="34" charset="0"/>
+                        <a:ea typeface="Calibri" panose="020F0502020204030204" pitchFamily="34" charset="0"/>
+                        <a:cs typeface="Times New Roman" panose="02020603050405020304" pitchFamily="18" charset="0"/>
+                      </a:endParaRPr>
+                    </a:p>
+                  </a:txBody>
+                  <a:tcPr marL="40640" marR="37465" marT="10160" marB="0"/>
+                </a:tc>
+                <a:extLst>
+                  <a:ext uri="{0D108BD9-81ED-4DB2-BD59-A6C34878D82A}">
+                    <a16:rowId xmlns:a16="http://schemas.microsoft.com/office/drawing/2014/main" val="4185359575"/>
+                  </a:ext>
+                </a:extLst>
+              </a:tr>
+              <a:tr h="289469">
+                <a:tc>
+                  <a:txBody>
+                    <a:bodyPr/>
+                    <a:lstStyle/>
+                    <a:p>
+                      <a:pPr marL="168275" indent="-168275" algn="l">
+                        <a:lnSpc>
+                          <a:spcPct val="107000"/>
+                        </a:lnSpc>
+                        <a:spcAft>
+                          <a:spcPts val="0"/>
+                        </a:spcAft>
+                      </a:pPr>
+                      <a:r>
+                        <a:rPr lang="en-US" sz="1400">
+                          <a:effectLst/>
+                        </a:rPr>
+                        <a:t>Yes/No</a:t>
+                      </a:r>
+                      <a:endParaRPr lang="en-US" sz="1400">
+                        <a:solidFill>
+                          <a:srgbClr val="000000"/>
+                        </a:solidFill>
+                        <a:effectLst/>
+                        <a:latin typeface="Calibri" panose="020F0502020204030204" pitchFamily="34" charset="0"/>
+                        <a:ea typeface="Calibri" panose="020F0502020204030204" pitchFamily="34" charset="0"/>
+                        <a:cs typeface="Times New Roman" panose="02020603050405020304" pitchFamily="18" charset="0"/>
+                      </a:endParaRPr>
+                    </a:p>
+                  </a:txBody>
+                  <a:tcPr marL="40640" marR="37465" marT="10160" marB="0"/>
+                </a:tc>
+                <a:tc>
+                  <a:txBody>
+                    <a:bodyPr/>
+                    <a:lstStyle/>
+                    <a:p>
+                      <a:pPr marL="168275" indent="-168275" algn="l">
+                        <a:lnSpc>
+                          <a:spcPct val="107000"/>
+                        </a:lnSpc>
+                        <a:spcAft>
+                          <a:spcPts val="0"/>
+                        </a:spcAft>
+                      </a:pPr>
+                      <a:r>
+                        <a:rPr lang="en-US" sz="1400">
+                          <a:effectLst/>
+                        </a:rPr>
+                        <a:t>Logička polja (Check-box)</a:t>
+                      </a:r>
+                      <a:endParaRPr lang="en-US" sz="1400">
+                        <a:solidFill>
+                          <a:srgbClr val="000000"/>
+                        </a:solidFill>
+                        <a:effectLst/>
+                        <a:latin typeface="Calibri" panose="020F0502020204030204" pitchFamily="34" charset="0"/>
+                        <a:ea typeface="Calibri" panose="020F0502020204030204" pitchFamily="34" charset="0"/>
+                        <a:cs typeface="Times New Roman" panose="02020603050405020304" pitchFamily="18" charset="0"/>
+                      </a:endParaRPr>
+                    </a:p>
+                  </a:txBody>
+                  <a:tcPr marL="40640" marR="37465" marT="10160" marB="0"/>
+                </a:tc>
+                <a:tc>
+                  <a:txBody>
+                    <a:bodyPr/>
+                    <a:lstStyle/>
+                    <a:p>
+                      <a:pPr marL="168275" indent="-168275" algn="l">
+                        <a:lnSpc>
+                          <a:spcPct val="107000"/>
+                        </a:lnSpc>
+                        <a:spcAft>
+                          <a:spcPts val="0"/>
+                        </a:spcAft>
+                      </a:pPr>
+                      <a:r>
+                        <a:rPr lang="en-US" sz="1400" dirty="0">
+                          <a:effectLst/>
+                        </a:rPr>
+                        <a:t>Da li je </a:t>
+                      </a:r>
+                      <a:r>
+                        <a:rPr lang="en-US" sz="1400" dirty="0" err="1">
+                          <a:effectLst/>
+                        </a:rPr>
+                        <a:t>automobil</a:t>
+                      </a:r>
+                      <a:r>
+                        <a:rPr lang="en-US" sz="1400" dirty="0">
+                          <a:effectLst/>
+                        </a:rPr>
+                        <a:t> </a:t>
+                      </a:r>
+                      <a:r>
+                        <a:rPr lang="en-US" sz="1400" dirty="0" err="1">
+                          <a:effectLst/>
+                        </a:rPr>
+                        <a:t>na</a:t>
+                      </a:r>
+                      <a:r>
+                        <a:rPr lang="en-US" sz="1400" dirty="0">
+                          <a:effectLst/>
+                        </a:rPr>
+                        <a:t> </a:t>
+                      </a:r>
+                      <a:r>
+                        <a:rPr lang="en-US" sz="1400" dirty="0" err="1">
+                          <a:effectLst/>
+                        </a:rPr>
+                        <a:t>servisu</a:t>
+                      </a:r>
+                      <a:r>
+                        <a:rPr lang="en-US" sz="1400" dirty="0">
+                          <a:effectLst/>
+                        </a:rPr>
+                        <a:t>?</a:t>
+                      </a:r>
+                      <a:endParaRPr lang="en-US" sz="1400" dirty="0">
+                        <a:solidFill>
+                          <a:srgbClr val="000000"/>
+                        </a:solidFill>
+                        <a:effectLst/>
+                        <a:latin typeface="Calibri" panose="020F0502020204030204" pitchFamily="34" charset="0"/>
+                        <a:ea typeface="Calibri" panose="020F0502020204030204" pitchFamily="34" charset="0"/>
+                        <a:cs typeface="Times New Roman" panose="02020603050405020304" pitchFamily="18" charset="0"/>
+                      </a:endParaRPr>
+                    </a:p>
+                  </a:txBody>
+                  <a:tcPr marL="40640" marR="37465" marT="10160" marB="0"/>
+                </a:tc>
+                <a:extLst>
+                  <a:ext uri="{0D108BD9-81ED-4DB2-BD59-A6C34878D82A}">
+                    <a16:rowId xmlns:a16="http://schemas.microsoft.com/office/drawing/2014/main" val="1194937976"/>
+                  </a:ext>
+                </a:extLst>
+              </a:tr>
+            </a:tbl>
+          </a:graphicData>
+        </a:graphic>
+      </p:graphicFrame>
     </p:spTree>
     <p:extLst>
       <p:ext uri="{BB962C8B-B14F-4D97-AF65-F5344CB8AC3E}">
@@ -10096,10 +11154,26 @@
           <a:lstStyle/>
           <a:p>
             <a:r>
-              <a:rPr lang="sr-Latn-RS" sz="4000" dirty="0" smtClean="0"/>
-              <a:t>Rad s tabelama</a:t>
-            </a:r>
-            <a:endParaRPr lang="en-US" sz="4000" dirty="0"/>
+              <a:rPr lang="en-US" sz="4000" dirty="0" err="1"/>
+              <a:t>Unošenje</a:t>
+            </a:r>
+            <a:r>
+              <a:rPr lang="en-US" sz="4000" dirty="0"/>
+              <a:t> </a:t>
+            </a:r>
+            <a:r>
+              <a:rPr lang="en-US" sz="4000" dirty="0" err="1"/>
+              <a:t>podataka</a:t>
+            </a:r>
+            <a:r>
+              <a:rPr lang="en-US" sz="4000" dirty="0"/>
+              <a:t> u </a:t>
+            </a:r>
+            <a:r>
+              <a:rPr lang="en-US" sz="4000" dirty="0" err="1" smtClean="0"/>
+              <a:t>tabelu</a:t>
+            </a:r>
+            <a:endParaRPr lang="sr-Latn-RS" sz="4000" dirty="0"/>
           </a:p>
         </p:txBody>
       </p:sp>
@@ -10125,35 +11199,6 @@
           </a:bodyPr>
           <a:lstStyle/>
           <a:p>
-            <a:pPr marL="0" indent="0">
-              <a:buNone/>
-            </a:pPr>
-            <a:r>
-              <a:rPr lang="en-US" sz="2800" dirty="0" err="1"/>
-              <a:t>Unošenje</a:t>
-            </a:r>
-            <a:r>
-              <a:rPr lang="en-US" sz="2800" dirty="0"/>
-              <a:t> </a:t>
-            </a:r>
-            <a:r>
-              <a:rPr lang="en-US" sz="2800" dirty="0" err="1"/>
-              <a:t>podataka</a:t>
-            </a:r>
-            <a:r>
-              <a:rPr lang="en-US" sz="2800" dirty="0"/>
-              <a:t> u </a:t>
-            </a:r>
-            <a:r>
-              <a:rPr lang="en-US" sz="2800" dirty="0" err="1"/>
-              <a:t>tabelu</a:t>
-            </a:r>
-            <a:r>
-              <a:rPr lang="sr-Latn-RS" sz="2800" dirty="0" smtClean="0"/>
-              <a:t>:</a:t>
-            </a:r>
-          </a:p>
-          <a:p>
             <a:r>
               <a:rPr lang="en-US" sz="2800" dirty="0" err="1" smtClean="0"/>
               <a:t>Direktan</a:t>
@@ -10184,7 +11229,11 @@
             </a:r>
             <a:r>
               <a:rPr lang="en-US" sz="2800" dirty="0"/>
-              <a:t> u Excel-u </a:t>
+              <a:t> u </a:t>
+            </a:r>
+            <a:r>
+              <a:rPr lang="en-US" sz="2800" dirty="0" smtClean="0"/>
+              <a:t>Excel-u </a:t>
             </a:r>
             <a:r>
               <a:rPr lang="en-US" sz="2800" dirty="0" err="1"/>
@@ -10423,10 +11472,34 @@
           <a:lstStyle/>
           <a:p>
             <a:r>
-              <a:rPr lang="sr-Latn-RS" sz="4000" dirty="0" smtClean="0"/>
-              <a:t>Veza između tabela</a:t>
-            </a:r>
-            <a:endParaRPr lang="en-US" sz="4000" dirty="0"/>
+              <a:rPr lang="en-US" sz="4000" dirty="0" err="1"/>
+              <a:t>Vrste</a:t>
+            </a:r>
+            <a:r>
+              <a:rPr lang="en-US" sz="4000" dirty="0"/>
+              <a:t> </a:t>
+            </a:r>
+            <a:r>
+              <a:rPr lang="en-US" sz="4000" dirty="0" err="1"/>
+              <a:t>veza</a:t>
+            </a:r>
+            <a:r>
+              <a:rPr lang="en-US" sz="4000" dirty="0"/>
+              <a:t> </a:t>
+            </a:r>
+            <a:r>
+              <a:rPr lang="en-US" sz="4000" dirty="0" err="1"/>
+              <a:t>između</a:t>
+            </a:r>
+            <a:r>
+              <a:rPr lang="en-US" sz="4000" dirty="0"/>
+              <a:t> </a:t>
+            </a:r>
+            <a:r>
+              <a:rPr lang="en-US" sz="4000" dirty="0" err="1" smtClean="0"/>
+              <a:t>tabela</a:t>
+            </a:r>
+            <a:endParaRPr lang="sr-Latn-RS" sz="4000" dirty="0"/>
           </a:p>
         </p:txBody>
       </p:sp>
@@ -10451,43 +11524,6 @@
             <a:normAutofit/>
           </a:bodyPr>
           <a:lstStyle/>
-          <a:p>
-            <a:pPr marL="0" indent="0">
-              <a:buNone/>
-            </a:pPr>
-            <a:r>
-              <a:rPr lang="en-US" sz="2800" dirty="0" err="1"/>
-              <a:t>Vrste</a:t>
-            </a:r>
-            <a:r>
-              <a:rPr lang="en-US" sz="2800" dirty="0"/>
-              <a:t> </a:t>
-            </a:r>
-            <a:r>
-              <a:rPr lang="en-US" sz="2800" dirty="0" err="1"/>
-              <a:t>veza</a:t>
-            </a:r>
-            <a:r>
-              <a:rPr lang="en-US" sz="2800" dirty="0"/>
-              <a:t> </a:t>
-            </a:r>
-            <a:r>
-              <a:rPr lang="en-US" sz="2800" dirty="0" err="1"/>
-              <a:t>između</a:t>
-            </a:r>
-            <a:r>
-              <a:rPr lang="en-US" sz="2800" dirty="0"/>
-              <a:t> </a:t>
-            </a:r>
-            <a:r>
-              <a:rPr lang="en-US" sz="2800" dirty="0" err="1" smtClean="0"/>
-              <a:t>tabela</a:t>
-            </a:r>
-            <a:r>
-              <a:rPr lang="sr-Latn-RS" sz="2800" dirty="0" smtClean="0"/>
-              <a:t>:</a:t>
-            </a:r>
-          </a:p>
           <a:p>
             <a:r>
               <a:rPr lang="en-US" sz="2800" dirty="0" err="1" smtClean="0"/>
@@ -10778,10 +11814,18 @@
           <a:lstStyle/>
           <a:p>
             <a:r>
-              <a:rPr lang="sr-Latn-RS" sz="4000" dirty="0" smtClean="0"/>
-              <a:t>Veza između tabela</a:t>
-            </a:r>
-            <a:endParaRPr lang="en-US" sz="4000" dirty="0"/>
+              <a:rPr lang="en-US" sz="4000" dirty="0" err="1"/>
+              <a:t>Referencijalni</a:t>
+            </a:r>
+            <a:r>
+              <a:rPr lang="en-US" sz="4000" dirty="0"/>
+              <a:t> </a:t>
+            </a:r>
+            <a:r>
+              <a:rPr lang="en-US" sz="4000" dirty="0" err="1"/>
+              <a:t>integritet</a:t>
+            </a:r>
+            <a:endParaRPr lang="sr-Latn-RS" sz="4000" dirty="0"/>
           </a:p>
         </p:txBody>
       </p:sp>
@@ -10806,24 +11850,6 @@
             <a:normAutofit/>
           </a:bodyPr>
           <a:lstStyle/>
-          <a:p>
-            <a:pPr marL="0" indent="0">
-              <a:buNone/>
-            </a:pPr>
-            <a:r>
-              <a:rPr lang="en-US" sz="2800" dirty="0" err="1"/>
-              <a:t>Referencijalni</a:t>
-            </a:r>
-            <a:r>
-              <a:rPr lang="en-US" sz="2800" dirty="0"/>
-              <a:t> </a:t>
-            </a:r>
-            <a:r>
-              <a:rPr lang="en-US" sz="2800" dirty="0" err="1"/>
-              <a:t>integritet</a:t>
-            </a:r>
-            <a:endParaRPr lang="sr-Latn-RS" sz="2800" dirty="0" smtClean="0"/>
-          </a:p>
           <a:p>
             <a:r>
               <a:rPr lang="en-US" sz="2800" dirty="0" err="1" smtClean="0"/>
@@ -11129,8 +12155,8 @@
         </p:nvSpPr>
         <p:spPr>
           <a:xfrm>
-            <a:off x="1809752" y="1819275"/>
-            <a:ext cx="9477374" cy="4091947"/>
+            <a:off x="1809751" y="1819275"/>
+            <a:ext cx="9191623" cy="4091947"/>
           </a:xfrm>
         </p:spPr>
         <p:txBody>
@@ -11139,42 +12165,12 @@
           </a:bodyPr>
           <a:lstStyle/>
           <a:p>
-            <a:pPr marL="0" indent="0">
-              <a:buNone/>
-            </a:pPr>
-            <a:r>
-              <a:rPr lang="en-US" sz="2800" dirty="0" err="1"/>
-              <a:t>Šta</a:t>
-            </a:r>
-            <a:r>
-              <a:rPr lang="en-US" sz="2800" dirty="0"/>
-              <a:t> je </a:t>
-            </a:r>
-            <a:r>
-              <a:rPr lang="en-US" sz="2800" dirty="0" err="1"/>
-              <a:t>baza</a:t>
-            </a:r>
-            <a:r>
-              <a:rPr lang="en-US" sz="2800" dirty="0"/>
-              <a:t> </a:t>
-            </a:r>
-            <a:r>
-              <a:rPr lang="en-US" sz="2800" dirty="0" err="1"/>
-              <a:t>podataka</a:t>
-            </a:r>
-            <a:r>
-              <a:rPr lang="en-US" sz="2800" dirty="0"/>
-              <a:t>?</a:t>
-            </a:r>
-            <a:endParaRPr lang="sr-Latn-RS" sz="2800" dirty="0" smtClean="0"/>
-          </a:p>
-          <a:p>
-            <a:r>
-              <a:rPr lang="en-US" sz="2800" dirty="0" err="1"/>
+            <a:r>
+              <a:rPr lang="en-US" sz="2800" dirty="0" err="1" smtClean="0"/>
               <a:t>Baza</a:t>
             </a:r>
             <a:r>
-              <a:rPr lang="en-US" sz="2800" dirty="0"/>
+              <a:rPr lang="en-US" sz="2800" dirty="0" smtClean="0"/>
               <a:t> </a:t>
             </a:r>
             <a:r>
@@ -11716,26 +12712,9 @@
           <a:lstStyle/>
           <a:p>
             <a:r>
-              <a:rPr lang="en-US" sz="4000" dirty="0" err="1"/>
-              <a:t>Pojam</a:t>
-            </a:r>
-            <a:r>
-              <a:rPr lang="en-US" sz="4000" dirty="0"/>
-              <a:t> </a:t>
-            </a:r>
-            <a:r>
-              <a:rPr lang="en-US" sz="4000" dirty="0" err="1"/>
-              <a:t>baze</a:t>
-            </a:r>
-            <a:r>
-              <a:rPr lang="en-US" sz="4000" dirty="0"/>
-              <a:t> </a:t>
-            </a:r>
-            <a:r>
-              <a:rPr lang="en-US" sz="4000" dirty="0" err="1"/>
-              <a:t>podataka</a:t>
-            </a:r>
-            <a:endParaRPr lang="en-US" sz="4000" dirty="0"/>
+              <a:rPr lang="sr-Latn-RS" sz="4000" dirty="0"/>
+              <a:t>Zašto su baze podataka važne?</a:t>
+            </a:r>
           </a:p>
         </p:txBody>
       </p:sp>
@@ -11751,23 +12730,14 @@
         </p:nvSpPr>
         <p:spPr>
           <a:xfrm>
-            <a:off x="1779639" y="1905000"/>
-            <a:ext cx="9724973" cy="4006222"/>
+            <a:off x="1779640" y="1905000"/>
+            <a:ext cx="9259836" cy="4006222"/>
           </a:xfrm>
         </p:spPr>
         <p:txBody>
           <a:bodyPr/>
           <a:lstStyle/>
           <a:p>
-            <a:pPr marL="0" indent="0">
-              <a:buNone/>
-            </a:pPr>
-            <a:r>
-              <a:rPr lang="sr-Latn-RS" sz="2800" dirty="0" smtClean="0"/>
-              <a:t>Zašto su baze podataka važne?</a:t>
-            </a:r>
-          </a:p>
-          <a:p>
             <a:r>
               <a:rPr lang="en-US" sz="2800" dirty="0" err="1" smtClean="0"/>
               <a:t>Omogućavaju</a:t>
@@ -11951,12 +12921,12 @@
               <a:t> </a:t>
             </a:r>
             <a:r>
-              <a:rPr lang="en-US" sz="2800" dirty="0" err="1"/>
-              <a:t>podatk</a:t>
-            </a:r>
-            <a:r>
-              <a:rPr lang="en-US" dirty="0" err="1"/>
-              <a:t>e</a:t>
+              <a:rPr lang="en-US" sz="2800" dirty="0" err="1" smtClean="0"/>
+              <a:t>podat</a:t>
+            </a:r>
+            <a:r>
+              <a:rPr lang="sr-Latn-RS" sz="2800" dirty="0" smtClean="0"/>
+              <a:t>ke.</a:t>
             </a:r>
             <a:endParaRPr lang="en-US" dirty="0"/>
           </a:p>
@@ -12023,7 +12993,7 @@
           <a:p>
             <a:r>
               <a:rPr lang="en-US" sz="4000" dirty="0" err="1"/>
-              <a:t>Pojam</a:t>
+              <a:t>Primena</a:t>
             </a:r>
             <a:r>
               <a:rPr lang="en-US" sz="4000" dirty="0"/>
@@ -12031,17 +13001,17 @@
             </a:r>
             <a:r>
               <a:rPr lang="en-US" sz="4000" dirty="0" err="1"/>
-              <a:t>baze</a:t>
+              <a:t>baza</a:t>
             </a:r>
             <a:r>
               <a:rPr lang="en-US" sz="4000" dirty="0"/>
               <a:t> </a:t>
             </a:r>
             <a:r>
-              <a:rPr lang="en-US" sz="4000" dirty="0" err="1"/>
+              <a:rPr lang="en-US" sz="4000" dirty="0" err="1" smtClean="0"/>
               <a:t>podataka</a:t>
             </a:r>
-            <a:endParaRPr lang="en-US" sz="4000" dirty="0"/>
+            <a:endParaRPr lang="sr-Latn-RS" sz="4000" dirty="0"/>
           </a:p>
         </p:txBody>
       </p:sp>
@@ -12067,69 +13037,40 @@
           </a:bodyPr>
           <a:lstStyle/>
           <a:p>
-            <a:pPr marL="0" indent="0">
-              <a:buNone/>
-            </a:pPr>
-            <a:r>
-              <a:rPr lang="en-US" sz="2800" dirty="0" err="1"/>
-              <a:t>Primena</a:t>
-            </a:r>
-            <a:r>
-              <a:rPr lang="en-US" sz="2800" dirty="0"/>
-              <a:t> </a:t>
-            </a:r>
-            <a:r>
-              <a:rPr lang="en-US" sz="2800" dirty="0" err="1"/>
-              <a:t>baza</a:t>
-            </a:r>
-            <a:r>
-              <a:rPr lang="en-US" sz="2800" dirty="0"/>
-              <a:t> </a:t>
-            </a:r>
-            <a:r>
-              <a:rPr lang="en-US" sz="2800" dirty="0" err="1" smtClean="0"/>
-              <a:t>podataka</a:t>
-            </a:r>
-            <a:r>
-              <a:rPr lang="sr-Latn-RS" sz="2800" dirty="0" smtClean="0"/>
-              <a:t>:</a:t>
-            </a:r>
-          </a:p>
-          <a:p>
             <a:r>
               <a:rPr lang="en-US" sz="2800" dirty="0" err="1" smtClean="0"/>
               <a:t>Škole</a:t>
             </a:r>
             <a:r>
-              <a:rPr lang="en-US" sz="2800" dirty="0"/>
+              <a:rPr lang="en-US" sz="2800" dirty="0" smtClean="0"/>
               <a:t>: </a:t>
             </a:r>
             <a:r>
-              <a:rPr lang="en-US" sz="2800" dirty="0" err="1"/>
+              <a:rPr lang="en-US" sz="2800" dirty="0" err="1" smtClean="0"/>
               <a:t>spiskovi</a:t>
             </a:r>
             <a:r>
-              <a:rPr lang="en-US" sz="2800" dirty="0"/>
-              <a:t> </a:t>
-            </a:r>
-            <a:r>
-              <a:rPr lang="en-US" sz="2800" dirty="0" err="1"/>
+              <a:rPr lang="en-US" sz="2800" dirty="0" smtClean="0"/>
+              <a:t> </a:t>
+            </a:r>
+            <a:r>
+              <a:rPr lang="en-US" sz="2800" dirty="0" err="1" smtClean="0"/>
               <a:t>učenika</a:t>
             </a:r>
             <a:r>
-              <a:rPr lang="en-US" sz="2800" dirty="0"/>
+              <a:rPr lang="en-US" sz="2800" dirty="0" smtClean="0"/>
               <a:t>, </a:t>
             </a:r>
             <a:r>
-              <a:rPr lang="en-US" sz="2800" dirty="0" err="1"/>
+              <a:rPr lang="en-US" sz="2800" dirty="0" err="1" smtClean="0"/>
               <a:t>ocene</a:t>
             </a:r>
             <a:r>
-              <a:rPr lang="en-US" sz="2800" dirty="0"/>
+              <a:rPr lang="en-US" sz="2800" dirty="0" smtClean="0"/>
               <a:t>, </a:t>
             </a:r>
             <a:r>
-              <a:rPr lang="en-US" sz="2800" dirty="0" err="1"/>
+              <a:rPr lang="en-US" sz="2800" dirty="0" err="1" smtClean="0"/>
               <a:t>izostanci</a:t>
             </a:r>
             <a:r>
@@ -12339,31 +13280,19 @@
         </p:spPr>
         <p:txBody>
           <a:bodyPr>
-            <a:normAutofit/>
+            <a:normAutofit fontScale="90000"/>
           </a:bodyPr>
           <a:lstStyle/>
           <a:p>
             <a:r>
-              <a:rPr lang="en-US" sz="4000" dirty="0" err="1"/>
-              <a:t>Pojam</a:t>
-            </a:r>
-            <a:r>
-              <a:rPr lang="en-US" sz="4000" dirty="0"/>
-              <a:t> </a:t>
-            </a:r>
-            <a:r>
-              <a:rPr lang="en-US" sz="4000" dirty="0" err="1"/>
-              <a:t>baze</a:t>
-            </a:r>
-            <a:r>
-              <a:rPr lang="en-US" sz="4000" dirty="0"/>
-              <a:t> </a:t>
-            </a:r>
-            <a:r>
-              <a:rPr lang="en-US" sz="4000" dirty="0" err="1"/>
-              <a:t>podataka</a:t>
-            </a:r>
-            <a:endParaRPr lang="en-US" sz="4000" dirty="0"/>
+              <a:rPr lang="pl-PL" sz="4000" dirty="0"/>
+              <a:t>Sistemi za upravljanje bazama podataka (SUBP</a:t>
+            </a:r>
+            <a:r>
+              <a:rPr lang="pl-PL" sz="4000" dirty="0" smtClean="0"/>
+              <a:t>)</a:t>
+            </a:r>
+            <a:endParaRPr lang="pl-PL" sz="4000" dirty="0"/>
           </a:p>
         </p:txBody>
       </p:sp>
@@ -12379,8 +13308,8 @@
         </p:nvSpPr>
         <p:spPr>
           <a:xfrm>
-            <a:off x="1868128" y="1704974"/>
-            <a:ext cx="9828571" cy="4810125"/>
+            <a:off x="1868128" y="2047875"/>
+            <a:ext cx="9828571" cy="4467224"/>
           </a:xfrm>
         </p:spPr>
         <p:txBody>
@@ -12389,26 +13318,13 @@
           </a:bodyPr>
           <a:lstStyle/>
           <a:p>
-            <a:pPr marL="0" indent="0">
-              <a:buNone/>
-            </a:pPr>
-            <a:r>
-              <a:rPr lang="pl-PL" sz="2800" dirty="0" smtClean="0"/>
-              <a:t>Sistemi </a:t>
-            </a:r>
-            <a:r>
-              <a:rPr lang="pl-PL" sz="2800" dirty="0"/>
-              <a:t>za upravljanje bazama podataka (SUBP</a:t>
-            </a:r>
-            <a:r>
-              <a:rPr lang="pl-PL" sz="2800" dirty="0" smtClean="0"/>
-              <a:t>):</a:t>
-            </a:r>
-          </a:p>
-          <a:p>
-            <a:r>
-              <a:rPr lang="en-US" sz="2800" dirty="0"/>
-              <a:t>SQLite: </a:t>
+            <a:r>
+              <a:rPr lang="en-US" sz="2800" dirty="0" smtClean="0"/>
+              <a:t>SQLite</a:t>
+            </a:r>
+            <a:r>
+              <a:rPr lang="en-US" sz="2800" dirty="0"/>
+              <a:t>: </a:t>
             </a:r>
             <a:r>
               <a:rPr lang="en-US" sz="2800" dirty="0" err="1"/>
@@ -12750,26 +13666,9 @@
           <a:lstStyle/>
           <a:p>
             <a:r>
-              <a:rPr lang="en-US" sz="4000" dirty="0" err="1"/>
-              <a:t>Pojam</a:t>
-            </a:r>
-            <a:r>
-              <a:rPr lang="en-US" sz="4000" dirty="0"/>
-              <a:t> </a:t>
-            </a:r>
-            <a:r>
-              <a:rPr lang="en-US" sz="4000" dirty="0" err="1"/>
-              <a:t>baze</a:t>
-            </a:r>
-            <a:r>
-              <a:rPr lang="en-US" sz="4000" dirty="0"/>
-              <a:t> </a:t>
-            </a:r>
-            <a:r>
-              <a:rPr lang="en-US" sz="4000" dirty="0" err="1"/>
-              <a:t>podataka</a:t>
-            </a:r>
-            <a:endParaRPr lang="en-US" sz="4000" dirty="0"/>
+              <a:rPr lang="pl-PL" sz="4000" dirty="0"/>
+              <a:t>Razlika između podataka i informacije</a:t>
+            </a:r>
           </a:p>
         </p:txBody>
       </p:sp>
@@ -12785,8 +13684,8 @@
         </p:nvSpPr>
         <p:spPr>
           <a:xfrm>
-            <a:off x="1868128" y="1904999"/>
-            <a:ext cx="9047521" cy="4143376"/>
+            <a:off x="1868128" y="1495425"/>
+            <a:ext cx="9047521" cy="4552950"/>
           </a:xfrm>
         </p:spPr>
         <p:txBody>
@@ -12795,21 +13694,8 @@
           </a:bodyPr>
           <a:lstStyle/>
           <a:p>
-            <a:pPr marL="0" indent="0">
-              <a:buNone/>
-            </a:pPr>
-            <a:r>
-              <a:rPr lang="pl-PL" sz="2800" dirty="0"/>
-              <a:t>Razlika između podataka i </a:t>
-            </a:r>
-            <a:r>
-              <a:rPr lang="pl-PL" sz="2800" dirty="0" smtClean="0"/>
-              <a:t>informacije</a:t>
-            </a:r>
-          </a:p>
-          <a:p>
-            <a:r>
-              <a:rPr lang="en-US" sz="2800" dirty="0" err="1"/>
+            <a:r>
+              <a:rPr lang="en-US" sz="2800" dirty="0" err="1" smtClean="0"/>
               <a:t>Podatak</a:t>
             </a:r>
             <a:r>
@@ -13021,6 +13907,541 @@
           </a:p>
         </p:txBody>
       </p:sp>
+      <p:graphicFrame>
+        <p:nvGraphicFramePr>
+          <p:cNvPr id="4" name="Table 3"/>
+          <p:cNvGraphicFramePr>
+            <a:graphicFrameLocks noGrp="1"/>
+          </p:cNvGraphicFramePr>
+          <p:nvPr>
+            <p:extLst>
+              <p:ext uri="{D42A27DB-BD31-4B8C-83A1-F6EECF244321}">
+                <p14:modId xmlns:p14="http://schemas.microsoft.com/office/powerpoint/2010/main" val="725439754"/>
+              </p:ext>
+            </p:extLst>
+          </p:nvPr>
+        </p:nvGraphicFramePr>
+        <p:xfrm>
+          <a:off x="1868129" y="4600575"/>
+          <a:ext cx="9636483" cy="1621347"/>
+        </p:xfrm>
+        <a:graphic>
+          <a:graphicData uri="http://schemas.openxmlformats.org/drawingml/2006/table">
+            <a:tbl>
+              <a:tblPr firstRow="1" firstCol="1" bandRow="1">
+                <a:tableStyleId>{5C22544A-7EE6-4342-B048-85BDC9FD1C3A}</a:tableStyleId>
+              </a:tblPr>
+              <a:tblGrid>
+                <a:gridCol w="2224913">
+                  <a:extLst>
+                    <a:ext uri="{9D8B030D-6E8A-4147-A177-3AD203B41FA5}">
+                      <a16:colId xmlns:a16="http://schemas.microsoft.com/office/drawing/2014/main" val="679651800"/>
+                    </a:ext>
+                  </a:extLst>
+                </a:gridCol>
+                <a:gridCol w="2755903">
+                  <a:extLst>
+                    <a:ext uri="{9D8B030D-6E8A-4147-A177-3AD203B41FA5}">
+                      <a16:colId xmlns:a16="http://schemas.microsoft.com/office/drawing/2014/main" val="1668740094"/>
+                    </a:ext>
+                  </a:extLst>
+                </a:gridCol>
+                <a:gridCol w="4655667">
+                  <a:extLst>
+                    <a:ext uri="{9D8B030D-6E8A-4147-A177-3AD203B41FA5}">
+                      <a16:colId xmlns:a16="http://schemas.microsoft.com/office/drawing/2014/main" val="2788036190"/>
+                    </a:ext>
+                  </a:extLst>
+                </a:gridCol>
+              </a:tblGrid>
+              <a:tr h="276429">
+                <a:tc>
+                  <a:txBody>
+                    <a:bodyPr/>
+                    <a:lstStyle/>
+                    <a:p>
+                      <a:pPr marL="168275" indent="-168275" algn="l">
+                        <a:lnSpc>
+                          <a:spcPct val="107000"/>
+                        </a:lnSpc>
+                        <a:spcAft>
+                          <a:spcPts val="0"/>
+                        </a:spcAft>
+                      </a:pPr>
+                      <a:r>
+                        <a:rPr lang="en-US" sz="1400">
+                          <a:effectLst/>
+                        </a:rPr>
+                        <a:t>Karakteristika</a:t>
+                      </a:r>
+                      <a:endParaRPr lang="en-US" sz="1400">
+                        <a:solidFill>
+                          <a:srgbClr val="000000"/>
+                        </a:solidFill>
+                        <a:effectLst/>
+                        <a:latin typeface="Calibri" panose="020F0502020204030204" pitchFamily="34" charset="0"/>
+                        <a:ea typeface="Calibri" panose="020F0502020204030204" pitchFamily="34" charset="0"/>
+                        <a:cs typeface="Times New Roman" panose="02020603050405020304" pitchFamily="18" charset="0"/>
+                      </a:endParaRPr>
+                    </a:p>
+                  </a:txBody>
+                  <a:tcPr marL="78740" marR="73025" marT="20320" marB="0"/>
+                </a:tc>
+                <a:tc>
+                  <a:txBody>
+                    <a:bodyPr/>
+                    <a:lstStyle/>
+                    <a:p>
+                      <a:pPr marL="168275" indent="-168275" algn="l">
+                        <a:lnSpc>
+                          <a:spcPct val="107000"/>
+                        </a:lnSpc>
+                        <a:spcAft>
+                          <a:spcPts val="0"/>
+                        </a:spcAft>
+                      </a:pPr>
+                      <a:r>
+                        <a:rPr lang="en-US" sz="1400">
+                          <a:effectLst/>
+                        </a:rPr>
+                        <a:t>Podatak</a:t>
+                      </a:r>
+                      <a:endParaRPr lang="en-US" sz="1400">
+                        <a:solidFill>
+                          <a:srgbClr val="000000"/>
+                        </a:solidFill>
+                        <a:effectLst/>
+                        <a:latin typeface="Calibri" panose="020F0502020204030204" pitchFamily="34" charset="0"/>
+                        <a:ea typeface="Calibri" panose="020F0502020204030204" pitchFamily="34" charset="0"/>
+                        <a:cs typeface="Times New Roman" panose="02020603050405020304" pitchFamily="18" charset="0"/>
+                      </a:endParaRPr>
+                    </a:p>
+                  </a:txBody>
+                  <a:tcPr marL="78740" marR="73025" marT="20320" marB="0"/>
+                </a:tc>
+                <a:tc>
+                  <a:txBody>
+                    <a:bodyPr/>
+                    <a:lstStyle/>
+                    <a:p>
+                      <a:pPr marL="168275" indent="-168275" algn="l">
+                        <a:lnSpc>
+                          <a:spcPct val="107000"/>
+                        </a:lnSpc>
+                        <a:spcAft>
+                          <a:spcPts val="0"/>
+                        </a:spcAft>
+                      </a:pPr>
+                      <a:r>
+                        <a:rPr lang="en-US" sz="1400">
+                          <a:effectLst/>
+                        </a:rPr>
+                        <a:t>Informacija</a:t>
+                      </a:r>
+                      <a:endParaRPr lang="en-US" sz="1400">
+                        <a:solidFill>
+                          <a:srgbClr val="000000"/>
+                        </a:solidFill>
+                        <a:effectLst/>
+                        <a:latin typeface="Calibri" panose="020F0502020204030204" pitchFamily="34" charset="0"/>
+                        <a:ea typeface="Calibri" panose="020F0502020204030204" pitchFamily="34" charset="0"/>
+                        <a:cs typeface="Times New Roman" panose="02020603050405020304" pitchFamily="18" charset="0"/>
+                      </a:endParaRPr>
+                    </a:p>
+                  </a:txBody>
+                  <a:tcPr marL="78740" marR="73025" marT="20320" marB="0"/>
+                </a:tc>
+                <a:extLst>
+                  <a:ext uri="{0D108BD9-81ED-4DB2-BD59-A6C34878D82A}">
+                    <a16:rowId xmlns:a16="http://schemas.microsoft.com/office/drawing/2014/main" val="887253735"/>
+                  </a:ext>
+                </a:extLst>
+              </a:tr>
+              <a:tr h="276530">
+                <a:tc>
+                  <a:txBody>
+                    <a:bodyPr/>
+                    <a:lstStyle/>
+                    <a:p>
+                      <a:pPr marL="168275" indent="-168275" algn="l">
+                        <a:lnSpc>
+                          <a:spcPct val="107000"/>
+                        </a:lnSpc>
+                        <a:spcAft>
+                          <a:spcPts val="0"/>
+                        </a:spcAft>
+                      </a:pPr>
+                      <a:r>
+                        <a:rPr lang="en-US" sz="1400">
+                          <a:effectLst/>
+                        </a:rPr>
+                        <a:t>Šta je to?</a:t>
+                      </a:r>
+                      <a:endParaRPr lang="en-US" sz="1400">
+                        <a:solidFill>
+                          <a:srgbClr val="000000"/>
+                        </a:solidFill>
+                        <a:effectLst/>
+                        <a:latin typeface="Calibri" panose="020F0502020204030204" pitchFamily="34" charset="0"/>
+                        <a:ea typeface="Calibri" panose="020F0502020204030204" pitchFamily="34" charset="0"/>
+                        <a:cs typeface="Times New Roman" panose="02020603050405020304" pitchFamily="18" charset="0"/>
+                      </a:endParaRPr>
+                    </a:p>
+                  </a:txBody>
+                  <a:tcPr marL="78740" marR="73025" marT="20320" marB="0"/>
+                </a:tc>
+                <a:tc>
+                  <a:txBody>
+                    <a:bodyPr/>
+                    <a:lstStyle/>
+                    <a:p>
+                      <a:pPr marL="168275" indent="-168275" algn="l">
+                        <a:lnSpc>
+                          <a:spcPct val="107000"/>
+                        </a:lnSpc>
+                        <a:spcAft>
+                          <a:spcPts val="0"/>
+                        </a:spcAft>
+                      </a:pPr>
+                      <a:r>
+                        <a:rPr lang="en-US" sz="1400">
+                          <a:effectLst/>
+                        </a:rPr>
+                        <a:t>Neka reč, broj</a:t>
+                      </a:r>
+                      <a:endParaRPr lang="en-US" sz="1400">
+                        <a:solidFill>
+                          <a:srgbClr val="000000"/>
+                        </a:solidFill>
+                        <a:effectLst/>
+                        <a:latin typeface="Calibri" panose="020F0502020204030204" pitchFamily="34" charset="0"/>
+                        <a:ea typeface="Calibri" panose="020F0502020204030204" pitchFamily="34" charset="0"/>
+                        <a:cs typeface="Times New Roman" panose="02020603050405020304" pitchFamily="18" charset="0"/>
+                      </a:endParaRPr>
+                    </a:p>
+                  </a:txBody>
+                  <a:tcPr marL="78740" marR="73025" marT="20320" marB="0"/>
+                </a:tc>
+                <a:tc>
+                  <a:txBody>
+                    <a:bodyPr/>
+                    <a:lstStyle/>
+                    <a:p>
+                      <a:pPr marL="168275" indent="-168275" algn="l">
+                        <a:lnSpc>
+                          <a:spcPct val="107000"/>
+                        </a:lnSpc>
+                        <a:spcAft>
+                          <a:spcPts val="0"/>
+                        </a:spcAft>
+                      </a:pPr>
+                      <a:r>
+                        <a:rPr lang="en-US" sz="1400" dirty="0" err="1">
+                          <a:effectLst/>
+                        </a:rPr>
+                        <a:t>Obrađen</a:t>
+                      </a:r>
+                      <a:r>
+                        <a:rPr lang="en-US" sz="1400" dirty="0">
+                          <a:effectLst/>
+                        </a:rPr>
+                        <a:t> </a:t>
+                      </a:r>
+                      <a:r>
+                        <a:rPr lang="en-US" sz="1400" dirty="0" err="1">
+                          <a:effectLst/>
+                        </a:rPr>
+                        <a:t>i</a:t>
+                      </a:r>
+                      <a:r>
+                        <a:rPr lang="en-US" sz="1400" dirty="0">
+                          <a:effectLst/>
+                        </a:rPr>
+                        <a:t> </a:t>
+                      </a:r>
+                      <a:r>
+                        <a:rPr lang="en-US" sz="1400" dirty="0" err="1">
+                          <a:effectLst/>
+                        </a:rPr>
+                        <a:t>smislen</a:t>
+                      </a:r>
+                      <a:r>
+                        <a:rPr lang="en-US" sz="1400" dirty="0">
+                          <a:effectLst/>
+                        </a:rPr>
+                        <a:t> </a:t>
+                      </a:r>
+                      <a:r>
+                        <a:rPr lang="en-US" sz="1400" dirty="0" err="1">
+                          <a:effectLst/>
+                        </a:rPr>
+                        <a:t>podatak</a:t>
+                      </a:r>
+                      <a:endParaRPr lang="en-US" sz="1400" dirty="0">
+                        <a:solidFill>
+                          <a:srgbClr val="000000"/>
+                        </a:solidFill>
+                        <a:effectLst/>
+                        <a:latin typeface="Calibri" panose="020F0502020204030204" pitchFamily="34" charset="0"/>
+                        <a:ea typeface="Calibri" panose="020F0502020204030204" pitchFamily="34" charset="0"/>
+                        <a:cs typeface="Times New Roman" panose="02020603050405020304" pitchFamily="18" charset="0"/>
+                      </a:endParaRPr>
+                    </a:p>
+                  </a:txBody>
+                  <a:tcPr marL="78740" marR="73025" marT="20320" marB="0"/>
+                </a:tc>
+                <a:extLst>
+                  <a:ext uri="{0D108BD9-81ED-4DB2-BD59-A6C34878D82A}">
+                    <a16:rowId xmlns:a16="http://schemas.microsoft.com/office/drawing/2014/main" val="1892184240"/>
+                  </a:ext>
+                </a:extLst>
+              </a:tr>
+              <a:tr h="534194">
+                <a:tc>
+                  <a:txBody>
+                    <a:bodyPr/>
+                    <a:lstStyle/>
+                    <a:p>
+                      <a:pPr marL="168275" indent="-168275" algn="l">
+                        <a:lnSpc>
+                          <a:spcPct val="107000"/>
+                        </a:lnSpc>
+                        <a:spcAft>
+                          <a:spcPts val="0"/>
+                        </a:spcAft>
+                      </a:pPr>
+                      <a:r>
+                        <a:rPr lang="en-US" sz="1400">
+                          <a:effectLst/>
+                        </a:rPr>
+                        <a:t>Značenje</a:t>
+                      </a:r>
+                      <a:endParaRPr lang="en-US" sz="1400">
+                        <a:solidFill>
+                          <a:srgbClr val="000000"/>
+                        </a:solidFill>
+                        <a:effectLst/>
+                        <a:latin typeface="Calibri" panose="020F0502020204030204" pitchFamily="34" charset="0"/>
+                        <a:ea typeface="Calibri" panose="020F0502020204030204" pitchFamily="34" charset="0"/>
+                        <a:cs typeface="Times New Roman" panose="02020603050405020304" pitchFamily="18" charset="0"/>
+                      </a:endParaRPr>
+                    </a:p>
+                  </a:txBody>
+                  <a:tcPr marL="78740" marR="73025" marT="20320" marB="0"/>
+                </a:tc>
+                <a:tc>
+                  <a:txBody>
+                    <a:bodyPr/>
+                    <a:lstStyle/>
+                    <a:p>
+                      <a:pPr marL="168275" indent="-168275" algn="l">
+                        <a:lnSpc>
+                          <a:spcPct val="107000"/>
+                        </a:lnSpc>
+                        <a:spcAft>
+                          <a:spcPts val="0"/>
+                        </a:spcAft>
+                      </a:pPr>
+                      <a:r>
+                        <a:rPr lang="en-US" sz="1400">
+                          <a:effectLst/>
+                        </a:rPr>
+                        <a:t>Sam po sebi ga nema</a:t>
+                      </a:r>
+                      <a:endParaRPr lang="en-US" sz="1400">
+                        <a:solidFill>
+                          <a:srgbClr val="000000"/>
+                        </a:solidFill>
+                        <a:effectLst/>
+                        <a:latin typeface="Calibri" panose="020F0502020204030204" pitchFamily="34" charset="0"/>
+                        <a:ea typeface="Calibri" panose="020F0502020204030204" pitchFamily="34" charset="0"/>
+                        <a:cs typeface="Times New Roman" panose="02020603050405020304" pitchFamily="18" charset="0"/>
+                      </a:endParaRPr>
+                    </a:p>
+                  </a:txBody>
+                  <a:tcPr marL="78740" marR="73025" marT="20320" marB="0"/>
+                </a:tc>
+                <a:tc>
+                  <a:txBody>
+                    <a:bodyPr/>
+                    <a:lstStyle/>
+                    <a:p>
+                      <a:pPr marL="168275" indent="-168275" algn="l">
+                        <a:lnSpc>
+                          <a:spcPct val="107000"/>
+                        </a:lnSpc>
+                        <a:spcAft>
+                          <a:spcPts val="0"/>
+                        </a:spcAft>
+                      </a:pPr>
+                      <a:r>
+                        <a:rPr lang="en-US" sz="1400">
+                          <a:effectLst/>
+                        </a:rPr>
+                        <a:t>Ima jasno značenje</a:t>
+                      </a:r>
+                      <a:endParaRPr lang="en-US" sz="1400">
+                        <a:solidFill>
+                          <a:srgbClr val="000000"/>
+                        </a:solidFill>
+                        <a:effectLst/>
+                        <a:latin typeface="Calibri" panose="020F0502020204030204" pitchFamily="34" charset="0"/>
+                        <a:ea typeface="Calibri" panose="020F0502020204030204" pitchFamily="34" charset="0"/>
+                        <a:cs typeface="Times New Roman" panose="02020603050405020304" pitchFamily="18" charset="0"/>
+                      </a:endParaRPr>
+                    </a:p>
+                  </a:txBody>
+                  <a:tcPr marL="78740" marR="73025" marT="20320" marB="0"/>
+                </a:tc>
+                <a:extLst>
+                  <a:ext uri="{0D108BD9-81ED-4DB2-BD59-A6C34878D82A}">
+                    <a16:rowId xmlns:a16="http://schemas.microsoft.com/office/drawing/2014/main" val="2722606776"/>
+                  </a:ext>
+                </a:extLst>
+              </a:tr>
+              <a:tr h="534194">
+                <a:tc>
+                  <a:txBody>
+                    <a:bodyPr/>
+                    <a:lstStyle/>
+                    <a:p>
+                      <a:pPr marL="168275" indent="-168275" algn="l">
+                        <a:lnSpc>
+                          <a:spcPct val="107000"/>
+                        </a:lnSpc>
+                        <a:spcAft>
+                          <a:spcPts val="0"/>
+                        </a:spcAft>
+                      </a:pPr>
+                      <a:r>
+                        <a:rPr lang="en-US" sz="1400">
+                          <a:effectLst/>
+                        </a:rPr>
+                        <a:t>Primer</a:t>
+                      </a:r>
+                      <a:endParaRPr lang="en-US" sz="1400">
+                        <a:solidFill>
+                          <a:srgbClr val="000000"/>
+                        </a:solidFill>
+                        <a:effectLst/>
+                        <a:latin typeface="Calibri" panose="020F0502020204030204" pitchFamily="34" charset="0"/>
+                        <a:ea typeface="Calibri" panose="020F0502020204030204" pitchFamily="34" charset="0"/>
+                        <a:cs typeface="Times New Roman" panose="02020603050405020304" pitchFamily="18" charset="0"/>
+                      </a:endParaRPr>
+                    </a:p>
+                  </a:txBody>
+                  <a:tcPr marL="78740" marR="73025" marT="20320" marB="0"/>
+                </a:tc>
+                <a:tc>
+                  <a:txBody>
+                    <a:bodyPr/>
+                    <a:lstStyle/>
+                    <a:p>
+                      <a:pPr marL="168275" indent="-168275" algn="l">
+                        <a:lnSpc>
+                          <a:spcPct val="107000"/>
+                        </a:lnSpc>
+                        <a:spcAft>
+                          <a:spcPts val="0"/>
+                        </a:spcAft>
+                      </a:pPr>
+                      <a:r>
+                        <a:rPr lang="en-US" sz="1400">
+                          <a:effectLst/>
+                        </a:rPr>
+                        <a:t>„12”</a:t>
+                      </a:r>
+                      <a:endParaRPr lang="en-US" sz="1400">
+                        <a:solidFill>
+                          <a:srgbClr val="000000"/>
+                        </a:solidFill>
+                        <a:effectLst/>
+                        <a:latin typeface="Calibri" panose="020F0502020204030204" pitchFamily="34" charset="0"/>
+                        <a:ea typeface="Calibri" panose="020F0502020204030204" pitchFamily="34" charset="0"/>
+                        <a:cs typeface="Times New Roman" panose="02020603050405020304" pitchFamily="18" charset="0"/>
+                      </a:endParaRPr>
+                    </a:p>
+                  </a:txBody>
+                  <a:tcPr marL="78740" marR="73025" marT="20320" marB="0"/>
+                </a:tc>
+                <a:tc>
+                  <a:txBody>
+                    <a:bodyPr/>
+                    <a:lstStyle/>
+                    <a:p>
+                      <a:pPr marL="168275" indent="-168275" algn="l">
+                        <a:lnSpc>
+                          <a:spcPct val="107000"/>
+                        </a:lnSpc>
+                        <a:spcAft>
+                          <a:spcPts val="0"/>
+                        </a:spcAft>
+                      </a:pPr>
+                      <a:r>
+                        <a:rPr lang="en-US" sz="1400" dirty="0">
+                          <a:effectLst/>
+                        </a:rPr>
+                        <a:t>„U mom </a:t>
+                      </a:r>
+                      <a:r>
+                        <a:rPr lang="en-US" sz="1400" dirty="0" err="1">
+                          <a:effectLst/>
+                        </a:rPr>
+                        <a:t>odeljenju</a:t>
+                      </a:r>
+                      <a:r>
+                        <a:rPr lang="en-US" sz="1400" dirty="0">
+                          <a:effectLst/>
+                        </a:rPr>
+                        <a:t> </a:t>
+                      </a:r>
+                      <a:r>
+                        <a:rPr lang="en-US" sz="1400" dirty="0" err="1">
+                          <a:effectLst/>
+                        </a:rPr>
+                        <a:t>ima</a:t>
+                      </a:r>
+                      <a:r>
+                        <a:rPr lang="en-US" sz="1400" dirty="0">
+                          <a:effectLst/>
+                        </a:rPr>
+                        <a:t> 12 „</a:t>
+                      </a:r>
+                      <a:r>
+                        <a:rPr lang="en-US" sz="1400" dirty="0" err="1">
+                          <a:effectLst/>
+                        </a:rPr>
+                        <a:t>devojčica</a:t>
+                      </a:r>
+                      <a:r>
+                        <a:rPr lang="en-US" sz="1400" dirty="0">
+                          <a:effectLst/>
+                        </a:rPr>
+                        <a:t>”</a:t>
+                      </a:r>
+                      <a:endParaRPr lang="en-US" sz="1400" dirty="0">
+                        <a:solidFill>
+                          <a:srgbClr val="000000"/>
+                        </a:solidFill>
+                        <a:effectLst/>
+                        <a:latin typeface="Calibri" panose="020F0502020204030204" pitchFamily="34" charset="0"/>
+                        <a:ea typeface="Calibri" panose="020F0502020204030204" pitchFamily="34" charset="0"/>
+                        <a:cs typeface="Times New Roman" panose="02020603050405020304" pitchFamily="18" charset="0"/>
+                      </a:endParaRPr>
+                    </a:p>
+                  </a:txBody>
+                  <a:tcPr marL="78740" marR="73025" marT="20320" marB="0"/>
+                </a:tc>
+                <a:extLst>
+                  <a:ext uri="{0D108BD9-81ED-4DB2-BD59-A6C34878D82A}">
+                    <a16:rowId xmlns:a16="http://schemas.microsoft.com/office/drawing/2014/main" val="249376404"/>
+                  </a:ext>
+                </a:extLst>
+              </a:tr>
+            </a:tbl>
+          </a:graphicData>
+        </a:graphic>
+      </p:graphicFrame>
     </p:spTree>
     <p:extLst>
       <p:ext uri="{BB962C8B-B14F-4D97-AF65-F5344CB8AC3E}">
@@ -13082,25 +14503,17 @@
           <a:p>
             <a:r>
               <a:rPr lang="en-US" sz="4000" dirty="0" err="1"/>
-              <a:t>Pojam</a:t>
+              <a:t>Informacioni</a:t>
             </a:r>
             <a:r>
               <a:rPr lang="en-US" sz="4000" dirty="0"/>
               <a:t> </a:t>
             </a:r>
             <a:r>
-              <a:rPr lang="en-US" sz="4000" dirty="0" err="1"/>
-              <a:t>baze</a:t>
-            </a:r>
-            <a:r>
-              <a:rPr lang="en-US" sz="4000" dirty="0"/>
-              <a:t> </a:t>
-            </a:r>
-            <a:r>
-              <a:rPr lang="en-US" sz="4000" dirty="0" err="1"/>
-              <a:t>podataka</a:t>
-            </a:r>
-            <a:endParaRPr lang="en-US" sz="4000" dirty="0"/>
+              <a:rPr lang="en-US" sz="4000" dirty="0" err="1" smtClean="0"/>
+              <a:t>sistemi</a:t>
+            </a:r>
+            <a:endParaRPr lang="sr-Latn-RS" sz="4000" dirty="0"/>
           </a:p>
         </p:txBody>
       </p:sp>
@@ -13126,93 +14539,72 @@
           </a:bodyPr>
           <a:lstStyle/>
           <a:p>
-            <a:pPr marL="0" indent="0">
-              <a:buNone/>
-            </a:pPr>
-            <a:r>
-              <a:rPr lang="en-US" sz="2800" dirty="0" err="1"/>
-              <a:t>Informacioni</a:t>
-            </a:r>
-            <a:r>
-              <a:rPr lang="en-US" sz="2800" dirty="0"/>
-              <a:t> </a:t>
-            </a:r>
             <a:r>
               <a:rPr lang="en-US" sz="2800" dirty="0" err="1" smtClean="0"/>
-              <a:t>sistemi</a:t>
-            </a:r>
-            <a:r>
-              <a:rPr lang="sr-Latn-RS" sz="2800" dirty="0" smtClean="0"/>
-              <a:t>:</a:t>
-            </a:r>
-          </a:p>
-          <a:p>
-            <a:r>
-              <a:rPr lang="en-US" sz="2800" dirty="0" err="1"/>
               <a:t>Sistem</a:t>
             </a:r>
             <a:r>
-              <a:rPr lang="en-US" sz="2800" dirty="0"/>
+              <a:rPr lang="en-US" sz="2800" dirty="0" smtClean="0"/>
               <a:t> u </a:t>
             </a:r>
             <a:r>
-              <a:rPr lang="en-US" sz="2800" dirty="0" err="1"/>
+              <a:rPr lang="en-US" sz="2800" dirty="0" err="1" smtClean="0"/>
               <a:t>kom</a:t>
             </a:r>
             <a:r>
-              <a:rPr lang="en-US" sz="2800" dirty="0"/>
-              <a:t> </a:t>
-            </a:r>
-            <a:r>
-              <a:rPr lang="en-US" sz="2800" dirty="0" err="1"/>
+              <a:rPr lang="en-US" sz="2800" dirty="0" smtClean="0"/>
+              <a:t> </a:t>
+            </a:r>
+            <a:r>
+              <a:rPr lang="en-US" sz="2800" dirty="0" err="1" smtClean="0"/>
               <a:t>ljudi</a:t>
             </a:r>
             <a:r>
-              <a:rPr lang="en-US" sz="2800" dirty="0"/>
+              <a:rPr lang="en-US" sz="2800" dirty="0" smtClean="0"/>
               <a:t>, </a:t>
             </a:r>
             <a:r>
-              <a:rPr lang="en-US" sz="2800" dirty="0" err="1"/>
+              <a:rPr lang="en-US" sz="2800" dirty="0" err="1" smtClean="0"/>
               <a:t>po</a:t>
             </a:r>
             <a:r>
-              <a:rPr lang="en-US" sz="2800" dirty="0"/>
-              <a:t> </a:t>
-            </a:r>
-            <a:r>
-              <a:rPr lang="en-US" sz="2800" dirty="0" err="1"/>
+              <a:rPr lang="en-US" sz="2800" dirty="0" smtClean="0"/>
+              <a:t> </a:t>
+            </a:r>
+            <a:r>
+              <a:rPr lang="en-US" sz="2800" dirty="0" err="1" smtClean="0"/>
               <a:t>određenim</a:t>
             </a:r>
             <a:r>
-              <a:rPr lang="en-US" sz="2800" dirty="0"/>
-              <a:t> </a:t>
-            </a:r>
-            <a:r>
-              <a:rPr lang="en-US" sz="2800" dirty="0" err="1"/>
+              <a:rPr lang="en-US" sz="2800" dirty="0" smtClean="0"/>
+              <a:t> </a:t>
+            </a:r>
+            <a:r>
+              <a:rPr lang="en-US" sz="2800" dirty="0" err="1" smtClean="0"/>
               <a:t>pravilima</a:t>
             </a:r>
             <a:r>
-              <a:rPr lang="en-US" sz="2800" dirty="0"/>
+              <a:rPr lang="en-US" sz="2800" dirty="0" smtClean="0"/>
               <a:t>, </a:t>
             </a:r>
             <a:r>
-              <a:rPr lang="en-US" sz="2800" dirty="0" err="1"/>
+              <a:rPr lang="en-US" sz="2800" dirty="0" err="1" smtClean="0"/>
               <a:t>pretvaraju</a:t>
             </a:r>
             <a:r>
-              <a:rPr lang="en-US" sz="2800" dirty="0"/>
-              <a:t> </a:t>
-            </a:r>
-            <a:r>
-              <a:rPr lang="en-US" sz="2800" dirty="0" err="1"/>
+              <a:rPr lang="en-US" sz="2800" dirty="0" smtClean="0"/>
+              <a:t> </a:t>
+            </a:r>
+            <a:r>
+              <a:rPr lang="en-US" sz="2800" dirty="0" err="1" smtClean="0"/>
               <a:t>podatke</a:t>
             </a:r>
             <a:r>
-              <a:rPr lang="en-US" sz="2800" dirty="0"/>
+              <a:rPr lang="en-US" sz="2800" dirty="0" smtClean="0"/>
               <a:t> u </a:t>
             </a:r>
             <a:r>
-              <a:rPr lang="en-US" sz="2800" dirty="0" err="1"/>
+              <a:rPr lang="en-US" sz="2800" dirty="0" err="1" smtClean="0"/>
               <a:t>informacije</a:t>
             </a:r>
             <a:r>
@@ -13411,31 +14803,19 @@
         </p:spPr>
         <p:txBody>
           <a:bodyPr>
-            <a:normAutofit/>
+            <a:normAutofit fontScale="90000"/>
           </a:bodyPr>
           <a:lstStyle/>
           <a:p>
             <a:r>
-              <a:rPr lang="en-US" sz="4000" dirty="0" err="1"/>
-              <a:t>Pojam</a:t>
-            </a:r>
-            <a:r>
-              <a:rPr lang="en-US" sz="4000" dirty="0"/>
-              <a:t> </a:t>
-            </a:r>
-            <a:r>
-              <a:rPr lang="en-US" sz="4000" dirty="0" err="1"/>
-              <a:t>baze</a:t>
-            </a:r>
-            <a:r>
-              <a:rPr lang="en-US" sz="4000" dirty="0"/>
-              <a:t> </a:t>
-            </a:r>
-            <a:r>
-              <a:rPr lang="en-US" sz="4000" dirty="0" err="1"/>
-              <a:t>podataka</a:t>
-            </a:r>
-            <a:endParaRPr lang="en-US" sz="4000" dirty="0"/>
+              <a:rPr lang="pl-PL" sz="4000" dirty="0"/>
+              <a:t>Veza baze podataka i informacionog </a:t>
+            </a:r>
+            <a:r>
+              <a:rPr lang="pl-PL" sz="4000" dirty="0" smtClean="0"/>
+              <a:t>sistema</a:t>
+            </a:r>
+            <a:endParaRPr lang="pl-PL" sz="4000" dirty="0"/>
           </a:p>
         </p:txBody>
       </p:sp>
@@ -13461,25 +14841,12 @@
           </a:bodyPr>
           <a:lstStyle/>
           <a:p>
-            <a:pPr marL="0" indent="0">
-              <a:buNone/>
-            </a:pPr>
-            <a:r>
-              <a:rPr lang="pl-PL" sz="2800" dirty="0"/>
-              <a:t>Veza baze podataka i informacionog </a:t>
-            </a:r>
-            <a:r>
-              <a:rPr lang="pl-PL" sz="2800" dirty="0" smtClean="0"/>
-              <a:t>sistema:</a:t>
-            </a:r>
-          </a:p>
-          <a:p>
-            <a:r>
-              <a:rPr lang="en-US" sz="2800" dirty="0" err="1"/>
+            <a:r>
+              <a:rPr lang="en-US" sz="2800" dirty="0" err="1" smtClean="0"/>
               <a:t>Baza</a:t>
             </a:r>
             <a:r>
-              <a:rPr lang="en-US" sz="2800" dirty="0"/>
+              <a:rPr lang="en-US" sz="2800" dirty="0" smtClean="0"/>
               <a:t> </a:t>
             </a:r>
             <a:r>
@@ -13780,25 +15147,25 @@
           <a:p>
             <a:r>
               <a:rPr lang="en-US" sz="4000" dirty="0" err="1"/>
-              <a:t>Pojam</a:t>
+              <a:t>Relacioni</a:t>
             </a:r>
             <a:r>
               <a:rPr lang="en-US" sz="4000" dirty="0"/>
-              <a:t> </a:t>
+              <a:t> model </a:t>
             </a:r>
             <a:r>
               <a:rPr lang="en-US" sz="4000" dirty="0" err="1"/>
-              <a:t>baze</a:t>
+              <a:t>baza</a:t>
             </a:r>
             <a:r>
               <a:rPr lang="en-US" sz="4000" dirty="0"/>
               <a:t> </a:t>
             </a:r>
             <a:r>
-              <a:rPr lang="en-US" sz="4000" dirty="0" err="1"/>
+              <a:rPr lang="en-US" sz="4000" dirty="0" err="1" smtClean="0"/>
               <a:t>podataka</a:t>
             </a:r>
-            <a:endParaRPr lang="en-US" sz="4000" dirty="0"/>
+            <a:endParaRPr lang="sr-Latn-RS" sz="4000" dirty="0"/>
           </a:p>
         </p:txBody>
       </p:sp>
@@ -13814,7 +15181,7 @@
         </p:nvSpPr>
         <p:spPr>
           <a:xfrm>
-            <a:off x="1868129" y="1986116"/>
+            <a:off x="1868129" y="2157566"/>
             <a:ext cx="8915400" cy="3777622"/>
           </a:xfrm>
         </p:spPr>
@@ -13823,35 +15190,6 @@
             <a:normAutofit/>
           </a:bodyPr>
           <a:lstStyle/>
-          <a:p>
-            <a:pPr marL="0" indent="0">
-              <a:buNone/>
-            </a:pPr>
-            <a:r>
-              <a:rPr lang="en-US" sz="2800" dirty="0" err="1"/>
-              <a:t>Relacioni</a:t>
-            </a:r>
-            <a:r>
-              <a:rPr lang="en-US" sz="2800" dirty="0"/>
-              <a:t> model </a:t>
-            </a:r>
-            <a:r>
-              <a:rPr lang="en-US" sz="2800" dirty="0" err="1"/>
-              <a:t>baza</a:t>
-            </a:r>
-            <a:r>
-              <a:rPr lang="en-US" sz="2800" dirty="0"/>
-              <a:t> </a:t>
-            </a:r>
-            <a:r>
-              <a:rPr lang="en-US" sz="2800" dirty="0" err="1" smtClean="0"/>
-              <a:t>podataka</a:t>
-            </a:r>
-            <a:r>
-              <a:rPr lang="sr-Latn-RS" sz="2800" dirty="0" smtClean="0"/>
-              <a:t>:</a:t>
-            </a:r>
-          </a:p>
           <a:p>
             <a:r>
               <a:rPr lang="en-US" sz="2800" dirty="0" err="1" smtClean="0"/>

--- a/2025_seminarski/ml24821_Tanja_Sevic/bazePodataka.pptx
+++ b/2025_seminarski/ml24821_Tanja_Sevic/bazePodataka.pptx
@@ -320,7 +320,7 @@
             <a:fld id="{B61BEF0D-F0BB-DE4B-95CE-6DB70DBA9567}" type="datetimeFigureOut">
               <a:rPr lang="en-US" dirty="0"/>
               <a:pPr/>
-              <a:t>3/19/2026</a:t>
+              <a:t>3/25/2026</a:t>
             </a:fld>
             <a:endParaRPr lang="en-US" dirty="0"/>
           </a:p>
@@ -655,7 +655,7 @@
             <a:fld id="{B61BEF0D-F0BB-DE4B-95CE-6DB70DBA9567}" type="datetimeFigureOut">
               <a:rPr lang="en-US" dirty="0"/>
               <a:pPr/>
-              <a:t>3/19/2026</a:t>
+              <a:t>3/25/2026</a:t>
             </a:fld>
             <a:endParaRPr lang="en-US" dirty="0"/>
           </a:p>
@@ -1053,7 +1053,7 @@
             <a:fld id="{B61BEF0D-F0BB-DE4B-95CE-6DB70DBA9567}" type="datetimeFigureOut">
               <a:rPr lang="en-US" dirty="0"/>
               <a:pPr/>
-              <a:t>3/19/2026</a:t>
+              <a:t>3/25/2026</a:t>
             </a:fld>
             <a:endParaRPr lang="en-US" dirty="0"/>
           </a:p>
@@ -1385,7 +1385,7 @@
             <a:fld id="{B61BEF0D-F0BB-DE4B-95CE-6DB70DBA9567}" type="datetimeFigureOut">
               <a:rPr lang="en-US" dirty="0"/>
               <a:pPr/>
-              <a:t>3/19/2026</a:t>
+              <a:t>3/25/2026</a:t>
             </a:fld>
             <a:endParaRPr lang="en-US" dirty="0"/>
           </a:p>
@@ -1702,7 +1702,7 @@
             <a:fld id="{B61BEF0D-F0BB-DE4B-95CE-6DB70DBA9567}" type="datetimeFigureOut">
               <a:rPr lang="en-US" dirty="0"/>
               <a:pPr/>
-              <a:t>3/19/2026</a:t>
+              <a:t>3/25/2026</a:t>
             </a:fld>
             <a:endParaRPr lang="en-US" dirty="0"/>
           </a:p>
@@ -2095,7 +2095,7 @@
             <a:fld id="{B61BEF0D-F0BB-DE4B-95CE-6DB70DBA9567}" type="datetimeFigureOut">
               <a:rPr lang="en-US" dirty="0"/>
               <a:pPr/>
-              <a:t>3/19/2026</a:t>
+              <a:t>3/25/2026</a:t>
             </a:fld>
             <a:endParaRPr lang="en-US" dirty="0"/>
           </a:p>
@@ -2349,7 +2349,7 @@
             <a:fld id="{B61BEF0D-F0BB-DE4B-95CE-6DB70DBA9567}" type="datetimeFigureOut">
               <a:rPr lang="en-US" dirty="0"/>
               <a:pPr/>
-              <a:t>3/19/2026</a:t>
+              <a:t>3/25/2026</a:t>
             </a:fld>
             <a:endParaRPr lang="en-US" dirty="0"/>
           </a:p>
@@ -2608,7 +2608,7 @@
             <a:fld id="{B61BEF0D-F0BB-DE4B-95CE-6DB70DBA9567}" type="datetimeFigureOut">
               <a:rPr lang="en-US" dirty="0"/>
               <a:pPr/>
-              <a:t>3/19/2026</a:t>
+              <a:t>3/25/2026</a:t>
             </a:fld>
             <a:endParaRPr lang="en-US" dirty="0"/>
           </a:p>
@@ -2867,7 +2867,7 @@
             <a:fld id="{B61BEF0D-F0BB-DE4B-95CE-6DB70DBA9567}" type="datetimeFigureOut">
               <a:rPr lang="en-US" dirty="0"/>
               <a:pPr/>
-              <a:t>3/19/2026</a:t>
+              <a:t>3/25/2026</a:t>
             </a:fld>
             <a:endParaRPr lang="en-US" dirty="0"/>
           </a:p>
@@ -3193,7 +3193,7 @@
             <a:fld id="{B61BEF0D-F0BB-DE4B-95CE-6DB70DBA9567}" type="datetimeFigureOut">
               <a:rPr lang="en-US" dirty="0"/>
               <a:pPr/>
-              <a:t>3/19/2026</a:t>
+              <a:t>3/25/2026</a:t>
             </a:fld>
             <a:endParaRPr lang="en-US" dirty="0"/>
           </a:p>
@@ -3513,7 +3513,7 @@
             <a:fld id="{B61BEF0D-F0BB-DE4B-95CE-6DB70DBA9567}" type="datetimeFigureOut">
               <a:rPr lang="en-US" dirty="0"/>
               <a:pPr/>
-              <a:t>3/19/2026</a:t>
+              <a:t>3/25/2026</a:t>
             </a:fld>
             <a:endParaRPr lang="en-US" dirty="0"/>
           </a:p>
@@ -3967,7 +3967,7 @@
             <a:fld id="{B61BEF0D-F0BB-DE4B-95CE-6DB70DBA9567}" type="datetimeFigureOut">
               <a:rPr lang="en-US" dirty="0"/>
               <a:pPr/>
-              <a:t>3/19/2026</a:t>
+              <a:t>3/25/2026</a:t>
             </a:fld>
             <a:endParaRPr lang="en-US" dirty="0"/>
           </a:p>
@@ -4169,7 +4169,7 @@
             <a:fld id="{B61BEF0D-F0BB-DE4B-95CE-6DB70DBA9567}" type="datetimeFigureOut">
               <a:rPr lang="en-US" dirty="0"/>
               <a:pPr/>
-              <a:t>3/19/2026</a:t>
+              <a:t>3/25/2026</a:t>
             </a:fld>
             <a:endParaRPr lang="en-US" dirty="0"/>
           </a:p>
@@ -4343,7 +4343,7 @@
             <a:fld id="{B61BEF0D-F0BB-DE4B-95CE-6DB70DBA9567}" type="datetimeFigureOut">
               <a:rPr lang="en-US" dirty="0"/>
               <a:pPr/>
-              <a:t>3/19/2026</a:t>
+              <a:t>3/25/2026</a:t>
             </a:fld>
             <a:endParaRPr lang="en-US" dirty="0"/>
           </a:p>
@@ -4673,7 +4673,7 @@
             <a:fld id="{B61BEF0D-F0BB-DE4B-95CE-6DB70DBA9567}" type="datetimeFigureOut">
               <a:rPr lang="en-US" dirty="0"/>
               <a:pPr/>
-              <a:t>3/19/2026</a:t>
+              <a:t>3/25/2026</a:t>
             </a:fld>
             <a:endParaRPr lang="en-US" dirty="0"/>
           </a:p>
@@ -5015,7 +5015,7 @@
             <a:fld id="{B61BEF0D-F0BB-DE4B-95CE-6DB70DBA9567}" type="datetimeFigureOut">
               <a:rPr lang="en-US" dirty="0"/>
               <a:pPr/>
-              <a:t>3/19/2026</a:t>
+              <a:t>3/25/2026</a:t>
             </a:fld>
             <a:endParaRPr lang="en-US" dirty="0"/>
           </a:p>
@@ -7129,7 +7129,7 @@
             <a:fld id="{B61BEF0D-F0BB-DE4B-95CE-6DB70DBA9567}" type="datetimeFigureOut">
               <a:rPr lang="en-US" dirty="0"/>
               <a:pPr/>
-              <a:t>3/19/2026</a:t>
+              <a:t>3/25/2026</a:t>
             </a:fld>
             <a:endParaRPr lang="en-US" dirty="0"/>
           </a:p>
@@ -7936,12 +7936,17 @@
             <a:pPr algn="r"/>
             <a:r>
               <a:rPr lang="sr-Latn-RS" sz="1200" dirty="0"/>
-              <a:t>Metodika nastave matematike </a:t>
-            </a:r>
-            <a:r>
-              <a:rPr lang="sr-Latn-RS" sz="1200" dirty="0" smtClean="0"/>
-              <a:t>a</a:t>
-            </a:r>
+              <a:t>Metodika nastave </a:t>
+            </a:r>
+            <a:r>
+              <a:rPr lang="sr-Latn-RS" sz="1200"/>
+              <a:t>matematike </a:t>
+            </a:r>
+            <a:r>
+              <a:rPr lang="sr-Latn-RS" sz="1200" dirty="0"/>
+              <a:t>A</a:t>
+            </a:r>
+            <a:endParaRPr lang="sr-Latn-RS" sz="1200" dirty="0" smtClean="0"/>
           </a:p>
           <a:p>
             <a:pPr algn="r"/>
